--- a/docs/2026-2/cea055-estatistica-probabilidade/03-introducao-probabilidade/arquivos/Aula_03_Introducao_Probabilidade.pptx
+++ b/docs/2026-2/cea055-estatistica-probabilidade/03-introducao-probabilidade/arquivos/Aula_03_Introducao_Probabilidade.pptx
@@ -5,7 +5,7 @@
     <p:sldMasterId id="2147483648" r:id="rId1"/>
   </p:sldMasterIdLst>
   <p:notesMasterIdLst>
-    <p:notesMasterId r:id="rId34"/>
+    <p:notesMasterId r:id="rId35"/>
   </p:notesMasterIdLst>
   <p:sldIdLst>
     <p:sldId id="257" r:id="rId2"/>
@@ -40,6 +40,7 @@
     <p:sldId id="412" r:id="rId31"/>
     <p:sldId id="413" r:id="rId32"/>
     <p:sldId id="278" r:id="rId33"/>
+    <p:sldId id="420" r:id="rId34"/>
   </p:sldIdLst>
   <p:sldSz cx="12192000" cy="6858000"/>
   <p:notesSz cx="6858000" cy="9144000"/>
@@ -242,7 +243,7 @@
           <a:p>
             <a:fld id="{44623A65-BD25-40B6-8815-498297225DF7}" type="datetimeFigureOut">
               <a:rPr lang="pt-BR" smtClean="0"/>
-              <a:t>01/09/2026</a:t>
+              <a:t>22/10/2026</a:t>
             </a:fld>
             <a:endParaRPr lang="pt-BR" dirty="0"/>
           </a:p>
@@ -949,7 +950,7 @@
           <a:p>
             <a:fld id="{5B45E566-B383-4B2D-B951-1136FD38326E}" type="datetimeFigureOut">
               <a:rPr lang="pt-BR" smtClean="0"/>
-              <a:t>01/09/2026</a:t>
+              <a:t>22/10/2026</a:t>
             </a:fld>
             <a:endParaRPr lang="pt-BR" dirty="0"/>
           </a:p>
@@ -1147,7 +1148,7 @@
           <a:p>
             <a:fld id="{5B45E566-B383-4B2D-B951-1136FD38326E}" type="datetimeFigureOut">
               <a:rPr lang="pt-BR" smtClean="0"/>
-              <a:t>01/09/2026</a:t>
+              <a:t>22/10/2026</a:t>
             </a:fld>
             <a:endParaRPr lang="pt-BR" dirty="0"/>
           </a:p>
@@ -1355,7 +1356,7 @@
           <a:p>
             <a:fld id="{5B45E566-B383-4B2D-B951-1136FD38326E}" type="datetimeFigureOut">
               <a:rPr lang="pt-BR" smtClean="0"/>
-              <a:t>01/09/2026</a:t>
+              <a:t>22/10/2026</a:t>
             </a:fld>
             <a:endParaRPr lang="pt-BR" dirty="0"/>
           </a:p>
@@ -1553,7 +1554,7 @@
           <a:p>
             <a:fld id="{5B45E566-B383-4B2D-B951-1136FD38326E}" type="datetimeFigureOut">
               <a:rPr lang="pt-BR" smtClean="0"/>
-              <a:t>01/09/2026</a:t>
+              <a:t>22/10/2026</a:t>
             </a:fld>
             <a:endParaRPr lang="pt-BR" dirty="0"/>
           </a:p>
@@ -1828,7 +1829,7 @@
           <a:p>
             <a:fld id="{5B45E566-B383-4B2D-B951-1136FD38326E}" type="datetimeFigureOut">
               <a:rPr lang="pt-BR" smtClean="0"/>
-              <a:t>01/09/2026</a:t>
+              <a:t>22/10/2026</a:t>
             </a:fld>
             <a:endParaRPr lang="pt-BR" dirty="0"/>
           </a:p>
@@ -2093,7 +2094,7 @@
           <a:p>
             <a:fld id="{5B45E566-B383-4B2D-B951-1136FD38326E}" type="datetimeFigureOut">
               <a:rPr lang="pt-BR" smtClean="0"/>
-              <a:t>01/09/2026</a:t>
+              <a:t>22/10/2026</a:t>
             </a:fld>
             <a:endParaRPr lang="pt-BR" dirty="0"/>
           </a:p>
@@ -2505,7 +2506,7 @@
           <a:p>
             <a:fld id="{5B45E566-B383-4B2D-B951-1136FD38326E}" type="datetimeFigureOut">
               <a:rPr lang="pt-BR" smtClean="0"/>
-              <a:t>01/09/2026</a:t>
+              <a:t>22/10/2026</a:t>
             </a:fld>
             <a:endParaRPr lang="pt-BR" dirty="0"/>
           </a:p>
@@ -2646,7 +2647,7 @@
           <a:p>
             <a:fld id="{5B45E566-B383-4B2D-B951-1136FD38326E}" type="datetimeFigureOut">
               <a:rPr lang="pt-BR" smtClean="0"/>
-              <a:t>01/09/2026</a:t>
+              <a:t>22/10/2026</a:t>
             </a:fld>
             <a:endParaRPr lang="pt-BR" dirty="0"/>
           </a:p>
@@ -2759,7 +2760,7 @@
           <a:p>
             <a:fld id="{5B45E566-B383-4B2D-B951-1136FD38326E}" type="datetimeFigureOut">
               <a:rPr lang="pt-BR" smtClean="0"/>
-              <a:t>01/09/2026</a:t>
+              <a:t>22/10/2026</a:t>
             </a:fld>
             <a:endParaRPr lang="pt-BR" dirty="0"/>
           </a:p>
@@ -3070,7 +3071,7 @@
           <a:p>
             <a:fld id="{5B45E566-B383-4B2D-B951-1136FD38326E}" type="datetimeFigureOut">
               <a:rPr lang="pt-BR" smtClean="0"/>
-              <a:t>01/09/2026</a:t>
+              <a:t>22/10/2026</a:t>
             </a:fld>
             <a:endParaRPr lang="pt-BR" dirty="0"/>
           </a:p>
@@ -3358,7 +3359,7 @@
           <a:p>
             <a:fld id="{5B45E566-B383-4B2D-B951-1136FD38326E}" type="datetimeFigureOut">
               <a:rPr lang="pt-BR" smtClean="0"/>
-              <a:t>01/09/2026</a:t>
+              <a:t>22/10/2026</a:t>
             </a:fld>
             <a:endParaRPr lang="pt-BR" dirty="0"/>
           </a:p>
@@ -3623,7 +3624,7 @@
           <a:p>
             <a:fld id="{5B45E566-B383-4B2D-B951-1136FD38326E}" type="datetimeFigureOut">
               <a:rPr lang="pt-BR" smtClean="0"/>
-              <a:t>01/09/2026</a:t>
+              <a:t>22/10/2026</a:t>
             </a:fld>
             <a:endParaRPr lang="pt-BR" dirty="0"/>
           </a:p>
@@ -4365,62 +4366,6 @@
           <a:chExt cx="0" cy="0"/>
         </a:xfrm>
       </p:grpSpPr>
-      <p:sp>
-        <p:nvSpPr>
-          <p:cNvPr id="2" name="Título 1">
-            <a:extLst>
-              <a:ext uri="{FF2B5EF4-FFF2-40B4-BE49-F238E27FC236}">
-                <a16:creationId xmlns:a16="http://schemas.microsoft.com/office/drawing/2014/main" id="{BC798918-7CB4-450A-A042-F0B538CA25DE}"/>
-              </a:ext>
-            </a:extLst>
-          </p:cNvPr>
-          <p:cNvSpPr>
-            <a:spLocks noGrp="1"/>
-          </p:cNvSpPr>
-          <p:nvPr>
-            <p:ph type="title"/>
-          </p:nvPr>
-        </p:nvSpPr>
-        <p:spPr>
-          <a:xfrm>
-            <a:off x="1032611" y="0"/>
-            <a:ext cx="10827959" cy="1574800"/>
-          </a:xfrm>
-        </p:spPr>
-        <p:txBody>
-          <a:bodyPr>
-            <a:normAutofit/>
-          </a:bodyPr>
-          <a:lstStyle/>
-          <a:p>
-            <a:pPr algn="ctr"/>
-            <a:r>
-              <a:rPr lang="pt-BR" dirty="0">
-                <a:latin typeface="AlternateGothic2 BT" panose="020B0608020202050204" pitchFamily="34" charset="0"/>
-              </a:rPr>
-              <a:t>CEA055 – Estatística e Probabilidade</a:t>
-            </a:r>
-            <a:br>
-              <a:rPr lang="pt-BR" dirty="0">
-                <a:latin typeface="AlternateGothic2 BT" panose="020B0608020202050204" pitchFamily="34" charset="0"/>
-              </a:rPr>
-            </a:br>
-            <a:r>
-              <a:rPr lang="pt-BR" sz="2200" dirty="0">
-                <a:latin typeface="AlternateGothic2 BT" panose="020B0608020202050204" pitchFamily="34" charset="0"/>
-              </a:rPr>
-              <a:t>E</a:t>
-            </a:r>
-            <a:r>
-              <a:rPr lang="pt-BR" sz="2200" b="1" dirty="0"/>
-              <a:t>spaço Amostral e Eventos</a:t>
-            </a:r>
-            <a:endParaRPr lang="pt-BR" dirty="0">
-              <a:latin typeface="AlternateGothic2 BT" panose="020B0608020202050204" pitchFamily="34" charset="0"/>
-            </a:endParaRPr>
-          </a:p>
-        </p:txBody>
-      </p:sp>
       <mc:AlternateContent xmlns:mc="http://schemas.openxmlformats.org/markup-compatibility/2006" xmlns:a14="http://schemas.microsoft.com/office/drawing/2010/main">
         <mc:Choice Requires="a14">
           <p:sp>
@@ -5028,7 +4973,7 @@
         <p:spPr>
           <a:xfrm>
             <a:off x="361395" y="6488668"/>
-            <a:ext cx="2395336" cy="300210"/>
+            <a:ext cx="7620000" cy="300210"/>
           </a:xfrm>
           <a:prstGeom prst="rect">
             <a:avLst/>
@@ -5043,47 +4988,11 @@
           <a:p>
             <a:r>
               <a:rPr lang="pt-BR" sz="1351" dirty="0"/>
-              <a:t>Professor: Marcos Goulart Lima</a:t>
+              <a:t>CEA055 - Estatística e Probabilidade - Professor: Marcos Goulart Lima</a:t>
             </a:r>
           </a:p>
         </p:txBody>
       </p:sp>
-      <p:pic>
-        <p:nvPicPr>
-          <p:cNvPr id="8" name="Espaço Reservado para Conteúdo 4">
-            <a:extLst>
-              <a:ext uri="{FF2B5EF4-FFF2-40B4-BE49-F238E27FC236}">
-                <a16:creationId xmlns:a16="http://schemas.microsoft.com/office/drawing/2014/main" id="{65AB402D-D1A8-4F31-BA42-34A6F0FC69F9}"/>
-              </a:ext>
-            </a:extLst>
-          </p:cNvPr>
-          <p:cNvPicPr>
-            <a:picLocks noChangeAspect="1"/>
-          </p:cNvPicPr>
-          <p:nvPr/>
-        </p:nvPicPr>
-        <p:blipFill>
-          <a:blip r:embed="rId3">
-            <a:extLst>
-              <a:ext uri="{28A0092B-C50C-407E-A947-70E740481C1C}">
-                <a14:useLocalDpi xmlns:a14="http://schemas.microsoft.com/office/drawing/2010/main" val="0"/>
-              </a:ext>
-            </a:extLst>
-          </a:blip>
-          <a:stretch>
-            <a:fillRect/>
-          </a:stretch>
-        </p:blipFill>
-        <p:spPr>
-          <a:xfrm>
-            <a:off x="62144" y="112237"/>
-            <a:ext cx="588096" cy="1228523"/>
-          </a:xfrm>
-          <a:prstGeom prst="rect">
-            <a:avLst/>
-          </a:prstGeom>
-        </p:spPr>
-      </p:pic>
     </p:spTree>
     <p:extLst>
       <p:ext uri="{BB962C8B-B14F-4D97-AF65-F5344CB8AC3E}">
@@ -5114,62 +5023,6 @@
           <a:chExt cx="0" cy="0"/>
         </a:xfrm>
       </p:grpSpPr>
-      <p:sp>
-        <p:nvSpPr>
-          <p:cNvPr id="2" name="Título 1">
-            <a:extLst>
-              <a:ext uri="{FF2B5EF4-FFF2-40B4-BE49-F238E27FC236}">
-                <a16:creationId xmlns:a16="http://schemas.microsoft.com/office/drawing/2014/main" id="{BC798918-7CB4-450A-A042-F0B538CA25DE}"/>
-              </a:ext>
-            </a:extLst>
-          </p:cNvPr>
-          <p:cNvSpPr>
-            <a:spLocks noGrp="1"/>
-          </p:cNvSpPr>
-          <p:nvPr>
-            <p:ph type="title"/>
-          </p:nvPr>
-        </p:nvSpPr>
-        <p:spPr>
-          <a:xfrm>
-            <a:off x="1032611" y="0"/>
-            <a:ext cx="10827959" cy="1574800"/>
-          </a:xfrm>
-        </p:spPr>
-        <p:txBody>
-          <a:bodyPr>
-            <a:normAutofit/>
-          </a:bodyPr>
-          <a:lstStyle/>
-          <a:p>
-            <a:pPr algn="ctr"/>
-            <a:r>
-              <a:rPr lang="pt-BR" dirty="0">
-                <a:latin typeface="AlternateGothic2 BT" panose="020B0608020202050204" pitchFamily="34" charset="0"/>
-              </a:rPr>
-              <a:t>CEA055 – Estatística e Probabilidade</a:t>
-            </a:r>
-            <a:br>
-              <a:rPr lang="pt-BR" dirty="0">
-                <a:latin typeface="AlternateGothic2 BT" panose="020B0608020202050204" pitchFamily="34" charset="0"/>
-              </a:rPr>
-            </a:br>
-            <a:r>
-              <a:rPr lang="pt-BR" sz="2200" dirty="0">
-                <a:latin typeface="AlternateGothic2 BT" panose="020B0608020202050204" pitchFamily="34" charset="0"/>
-              </a:rPr>
-              <a:t>E</a:t>
-            </a:r>
-            <a:r>
-              <a:rPr lang="pt-BR" sz="2200" b="1" dirty="0"/>
-              <a:t>spaço Amostral e Eventos</a:t>
-            </a:r>
-            <a:endParaRPr lang="pt-BR" dirty="0">
-              <a:latin typeface="AlternateGothic2 BT" panose="020B0608020202050204" pitchFamily="34" charset="0"/>
-            </a:endParaRPr>
-          </a:p>
-        </p:txBody>
-      </p:sp>
       <mc:AlternateContent xmlns:mc="http://schemas.openxmlformats.org/markup-compatibility/2006" xmlns:a14="http://schemas.microsoft.com/office/drawing/2010/main">
         <mc:Choice Requires="a14">
           <p:sp>
@@ -5637,7 +5490,7 @@
         <p:spPr>
           <a:xfrm>
             <a:off x="361395" y="6488668"/>
-            <a:ext cx="2395336" cy="300210"/>
+            <a:ext cx="7620000" cy="300210"/>
           </a:xfrm>
           <a:prstGeom prst="rect">
             <a:avLst/>
@@ -5652,47 +5505,11 @@
           <a:p>
             <a:r>
               <a:rPr lang="pt-BR" sz="1351" dirty="0"/>
-              <a:t>Professor: Marcos Goulart Lima</a:t>
+              <a:t>CEA055 - Estatística e Probabilidade - Professor: Marcos Goulart Lima</a:t>
             </a:r>
           </a:p>
         </p:txBody>
       </p:sp>
-      <p:pic>
-        <p:nvPicPr>
-          <p:cNvPr id="8" name="Espaço Reservado para Conteúdo 4">
-            <a:extLst>
-              <a:ext uri="{FF2B5EF4-FFF2-40B4-BE49-F238E27FC236}">
-                <a16:creationId xmlns:a16="http://schemas.microsoft.com/office/drawing/2014/main" id="{65AB402D-D1A8-4F31-BA42-34A6F0FC69F9}"/>
-              </a:ext>
-            </a:extLst>
-          </p:cNvPr>
-          <p:cNvPicPr>
-            <a:picLocks noChangeAspect="1"/>
-          </p:cNvPicPr>
-          <p:nvPr/>
-        </p:nvPicPr>
-        <p:blipFill>
-          <a:blip r:embed="rId3">
-            <a:extLst>
-              <a:ext uri="{28A0092B-C50C-407E-A947-70E740481C1C}">
-                <a14:useLocalDpi xmlns:a14="http://schemas.microsoft.com/office/drawing/2010/main" val="0"/>
-              </a:ext>
-            </a:extLst>
-          </a:blip>
-          <a:stretch>
-            <a:fillRect/>
-          </a:stretch>
-        </p:blipFill>
-        <p:spPr>
-          <a:xfrm>
-            <a:off x="62144" y="112237"/>
-            <a:ext cx="588096" cy="1228523"/>
-          </a:xfrm>
-          <a:prstGeom prst="rect">
-            <a:avLst/>
-          </a:prstGeom>
-        </p:spPr>
-      </p:pic>
     </p:spTree>
     <p:extLst>
       <p:ext uri="{BB962C8B-B14F-4D97-AF65-F5344CB8AC3E}">
@@ -5723,62 +5540,6 @@
           <a:chExt cx="0" cy="0"/>
         </a:xfrm>
       </p:grpSpPr>
-      <p:sp>
-        <p:nvSpPr>
-          <p:cNvPr id="2" name="Título 1">
-            <a:extLst>
-              <a:ext uri="{FF2B5EF4-FFF2-40B4-BE49-F238E27FC236}">
-                <a16:creationId xmlns:a16="http://schemas.microsoft.com/office/drawing/2014/main" id="{BC798918-7CB4-450A-A042-F0B538CA25DE}"/>
-              </a:ext>
-            </a:extLst>
-          </p:cNvPr>
-          <p:cNvSpPr>
-            <a:spLocks noGrp="1"/>
-          </p:cNvSpPr>
-          <p:nvPr>
-            <p:ph type="title"/>
-          </p:nvPr>
-        </p:nvSpPr>
-        <p:spPr>
-          <a:xfrm>
-            <a:off x="1032611" y="2"/>
-            <a:ext cx="10827959" cy="1641228"/>
-          </a:xfrm>
-        </p:spPr>
-        <p:txBody>
-          <a:bodyPr>
-            <a:normAutofit/>
-          </a:bodyPr>
-          <a:lstStyle/>
-          <a:p>
-            <a:pPr algn="ctr"/>
-            <a:r>
-              <a:rPr lang="pt-BR" dirty="0">
-                <a:latin typeface="AlternateGothic2 BT" panose="020B0608020202050204" pitchFamily="34" charset="0"/>
-              </a:rPr>
-              <a:t>CEA055 – Estatística e Probabilidade</a:t>
-            </a:r>
-            <a:br>
-              <a:rPr lang="pt-BR" dirty="0">
-                <a:latin typeface="AlternateGothic2 BT" panose="020B0608020202050204" pitchFamily="34" charset="0"/>
-              </a:rPr>
-            </a:br>
-            <a:r>
-              <a:rPr lang="pt-BR" sz="2200" dirty="0">
-                <a:latin typeface="AlternateGothic2 BT" panose="020B0608020202050204" pitchFamily="34" charset="0"/>
-              </a:rPr>
-              <a:t>E</a:t>
-            </a:r>
-            <a:r>
-              <a:rPr lang="pt-BR" sz="2200" b="1" dirty="0"/>
-              <a:t>spaço Amostral e Eventos</a:t>
-            </a:r>
-            <a:endParaRPr lang="pt-BR" dirty="0">
-              <a:latin typeface="AlternateGothic2 BT" panose="020B0608020202050204" pitchFamily="34" charset="0"/>
-            </a:endParaRPr>
-          </a:p>
-        </p:txBody>
-      </p:sp>
       <p:pic>
         <p:nvPicPr>
           <p:cNvPr id="5" name="Espaço Reservado para Conteúdo 4">
@@ -5918,7 +5679,7 @@
         <p:spPr>
           <a:xfrm>
             <a:off x="361395" y="6488668"/>
-            <a:ext cx="2348848" cy="300210"/>
+            <a:ext cx="7620000" cy="300210"/>
           </a:xfrm>
           <a:prstGeom prst="rect">
             <a:avLst/>
@@ -5937,7 +5698,7 @@
                   <a:schemeClr val="bg1"/>
                 </a:solidFill>
               </a:rPr>
-              <a:t>Professor Marcos Goulart Lima</a:t>
+              <a:t>CEA055 - Estatística e Probabilidade - Professor: Marcos Goulart Lima</a:t>
             </a:r>
           </a:p>
         </p:txBody>
@@ -6065,8 +5826,8 @@
           </a:p>
         </p:txBody>
       </p:sp>
-      <mc:AlternateContent xmlns:mc="http://schemas.openxmlformats.org/markup-compatibility/2006">
-        <mc:Choice xmlns:a14="http://schemas.microsoft.com/office/drawing/2010/main" Requires="a14">
+      <mc:AlternateContent xmlns:mc="http://schemas.openxmlformats.org/markup-compatibility/2006" xmlns:a14="http://schemas.microsoft.com/office/drawing/2010/main">
+        <mc:Choice Requires="a14">
           <p:sp>
             <p:nvSpPr>
               <p:cNvPr id="4" name="TextBox 3"/>
@@ -6283,7 +6044,7 @@
             </p:txBody>
           </p:sp>
         </mc:Choice>
-        <mc:Fallback>
+        <mc:Fallback xmlns="">
           <p:sp>
             <p:nvSpPr>
               <p:cNvPr id="4" name="TextBox 3"/>
@@ -6365,7 +6126,7 @@
         <p:spPr>
           <a:xfrm>
             <a:off x="365760" y="6464808"/>
-            <a:ext cx="4828032" cy="310896"/>
+            <a:ext cx="7620000" cy="310896"/>
           </a:xfrm>
           <a:prstGeom prst="rect">
             <a:avLst/>
@@ -6384,7 +6145,7 @@
                   <a:srgbClr val="8A5C5E"/>
                 </a:solidFill>
               </a:rPr>
-              <a:t>Professor: Marcos Goulart Lima</a:t>
+              <a:t>CEA055 - Estatística e Probabilidade - Professor: Marcos Goulart Lima</a:t>
             </a:r>
           </a:p>
         </p:txBody>
@@ -6416,56 +6177,6 @@
       </p:grpSpPr>
       <p:sp>
         <p:nvSpPr>
-          <p:cNvPr id="2" name="Título 1">
-            <a:extLst>
-              <a:ext uri="{FF2B5EF4-FFF2-40B4-BE49-F238E27FC236}">
-                <a16:creationId xmlns:a16="http://schemas.microsoft.com/office/drawing/2014/main" id="{BC798918-7CB4-450A-A042-F0B538CA25DE}"/>
-              </a:ext>
-            </a:extLst>
-          </p:cNvPr>
-          <p:cNvSpPr>
-            <a:spLocks noGrp="1"/>
-          </p:cNvSpPr>
-          <p:nvPr>
-            <p:ph type="title"/>
-          </p:nvPr>
-        </p:nvSpPr>
-        <p:spPr>
-          <a:xfrm>
-            <a:off x="1032611" y="0"/>
-            <a:ext cx="10827959" cy="1574800"/>
-          </a:xfrm>
-        </p:spPr>
-        <p:txBody>
-          <a:bodyPr>
-            <a:normAutofit/>
-          </a:bodyPr>
-          <a:lstStyle/>
-          <a:p>
-            <a:pPr algn="ctr"/>
-            <a:r>
-              <a:rPr lang="pt-BR" dirty="0">
-                <a:latin typeface="AlternateGothic2 BT" panose="020B0608020202050204" pitchFamily="34" charset="0"/>
-              </a:rPr>
-              <a:t>CEA055 – Estatística e Probabilidade</a:t>
-            </a:r>
-            <a:br>
-              <a:rPr lang="pt-BR" dirty="0">
-                <a:latin typeface="AlternateGothic2 BT" panose="020B0608020202050204" pitchFamily="34" charset="0"/>
-              </a:rPr>
-            </a:br>
-            <a:r>
-              <a:rPr lang="pt-BR" sz="2200" b="1" dirty="0"/>
-              <a:t>Espaço Amostral e Eventos</a:t>
-            </a:r>
-            <a:endParaRPr lang="pt-BR" dirty="0">
-              <a:latin typeface="AlternateGothic2 BT" panose="020B0608020202050204" pitchFamily="34" charset="0"/>
-            </a:endParaRPr>
-          </a:p>
-        </p:txBody>
-      </p:sp>
-      <p:sp>
-        <p:nvSpPr>
           <p:cNvPr id="6" name="CaixaDeTexto 5">
             <a:extLst>
               <a:ext uri="{FF2B5EF4-FFF2-40B4-BE49-F238E27FC236}">
@@ -6565,7 +6276,7 @@
         <p:spPr>
           <a:xfrm>
             <a:off x="361395" y="6488668"/>
-            <a:ext cx="2395336" cy="300210"/>
+            <a:ext cx="7620000" cy="300210"/>
           </a:xfrm>
           <a:prstGeom prst="rect">
             <a:avLst/>
@@ -6580,47 +6291,11 @@
           <a:p>
             <a:r>
               <a:rPr lang="pt-BR" sz="1351" dirty="0"/>
-              <a:t>Professor: Marcos Goulart Lima</a:t>
+              <a:t>CEA055 - Estatística e Probabilidade - Professor: Marcos Goulart Lima</a:t>
             </a:r>
           </a:p>
         </p:txBody>
       </p:sp>
-      <p:pic>
-        <p:nvPicPr>
-          <p:cNvPr id="8" name="Espaço Reservado para Conteúdo 4">
-            <a:extLst>
-              <a:ext uri="{FF2B5EF4-FFF2-40B4-BE49-F238E27FC236}">
-                <a16:creationId xmlns:a16="http://schemas.microsoft.com/office/drawing/2014/main" id="{65AB402D-D1A8-4F31-BA42-34A6F0FC69F9}"/>
-              </a:ext>
-            </a:extLst>
-          </p:cNvPr>
-          <p:cNvPicPr>
-            <a:picLocks noChangeAspect="1"/>
-          </p:cNvPicPr>
-          <p:nvPr/>
-        </p:nvPicPr>
-        <p:blipFill>
-          <a:blip r:embed="rId2">
-            <a:extLst>
-              <a:ext uri="{28A0092B-C50C-407E-A947-70E740481C1C}">
-                <a14:useLocalDpi xmlns:a14="http://schemas.microsoft.com/office/drawing/2010/main" val="0"/>
-              </a:ext>
-            </a:extLst>
-          </a:blip>
-          <a:stretch>
-            <a:fillRect/>
-          </a:stretch>
-        </p:blipFill>
-        <p:spPr>
-          <a:xfrm>
-            <a:off x="62144" y="112237"/>
-            <a:ext cx="588096" cy="1228523"/>
-          </a:xfrm>
-          <a:prstGeom prst="rect">
-            <a:avLst/>
-          </a:prstGeom>
-        </p:spPr>
-      </p:pic>
     </p:spTree>
     <p:extLst>
       <p:ext uri="{BB962C8B-B14F-4D97-AF65-F5344CB8AC3E}">
@@ -6653,56 +6328,6 @@
       </p:grpSpPr>
       <p:sp>
         <p:nvSpPr>
-          <p:cNvPr id="2" name="Título 1">
-            <a:extLst>
-              <a:ext uri="{FF2B5EF4-FFF2-40B4-BE49-F238E27FC236}">
-                <a16:creationId xmlns:a16="http://schemas.microsoft.com/office/drawing/2014/main" id="{BC798918-7CB4-450A-A042-F0B538CA25DE}"/>
-              </a:ext>
-            </a:extLst>
-          </p:cNvPr>
-          <p:cNvSpPr>
-            <a:spLocks noGrp="1"/>
-          </p:cNvSpPr>
-          <p:nvPr>
-            <p:ph type="title"/>
-          </p:nvPr>
-        </p:nvSpPr>
-        <p:spPr>
-          <a:xfrm>
-            <a:off x="1032611" y="0"/>
-            <a:ext cx="10827959" cy="1574800"/>
-          </a:xfrm>
-        </p:spPr>
-        <p:txBody>
-          <a:bodyPr>
-            <a:normAutofit/>
-          </a:bodyPr>
-          <a:lstStyle/>
-          <a:p>
-            <a:pPr algn="ctr"/>
-            <a:r>
-              <a:rPr lang="pt-BR" dirty="0">
-                <a:latin typeface="AlternateGothic2 BT" panose="020B0608020202050204" pitchFamily="34" charset="0"/>
-              </a:rPr>
-              <a:t>CEA055 – Estatística e Probabilidade</a:t>
-            </a:r>
-            <a:br>
-              <a:rPr lang="pt-BR" dirty="0">
-                <a:latin typeface="AlternateGothic2 BT" panose="020B0608020202050204" pitchFamily="34" charset="0"/>
-              </a:rPr>
-            </a:br>
-            <a:r>
-              <a:rPr lang="pt-BR" sz="2200" b="1" dirty="0"/>
-              <a:t>Espaço Amostral e Eventos</a:t>
-            </a:r>
-            <a:endParaRPr lang="pt-BR" dirty="0">
-              <a:latin typeface="AlternateGothic2 BT" panose="020B0608020202050204" pitchFamily="34" charset="0"/>
-            </a:endParaRPr>
-          </a:p>
-        </p:txBody>
-      </p:sp>
-      <p:sp>
-        <p:nvSpPr>
           <p:cNvPr id="6" name="CaixaDeTexto 5">
             <a:extLst>
               <a:ext uri="{FF2B5EF4-FFF2-40B4-BE49-F238E27FC236}">
@@ -6821,7 +6446,7 @@
         <p:spPr>
           <a:xfrm>
             <a:off x="361395" y="6488668"/>
-            <a:ext cx="2395336" cy="300210"/>
+            <a:ext cx="7620000" cy="300210"/>
           </a:xfrm>
           <a:prstGeom prst="rect">
             <a:avLst/>
@@ -6836,47 +6461,11 @@
           <a:p>
             <a:r>
               <a:rPr lang="pt-BR" sz="1351" dirty="0"/>
-              <a:t>Professor: Marcos Goulart Lima</a:t>
+              <a:t>CEA055 - Estatística e Probabilidade - Professor: Marcos Goulart Lima</a:t>
             </a:r>
           </a:p>
         </p:txBody>
       </p:sp>
-      <p:pic>
-        <p:nvPicPr>
-          <p:cNvPr id="8" name="Espaço Reservado para Conteúdo 4">
-            <a:extLst>
-              <a:ext uri="{FF2B5EF4-FFF2-40B4-BE49-F238E27FC236}">
-                <a16:creationId xmlns:a16="http://schemas.microsoft.com/office/drawing/2014/main" id="{65AB402D-D1A8-4F31-BA42-34A6F0FC69F9}"/>
-              </a:ext>
-            </a:extLst>
-          </p:cNvPr>
-          <p:cNvPicPr>
-            <a:picLocks noChangeAspect="1"/>
-          </p:cNvPicPr>
-          <p:nvPr/>
-        </p:nvPicPr>
-        <p:blipFill>
-          <a:blip r:embed="rId3">
-            <a:extLst>
-              <a:ext uri="{28A0092B-C50C-407E-A947-70E740481C1C}">
-                <a14:useLocalDpi xmlns:a14="http://schemas.microsoft.com/office/drawing/2010/main" val="0"/>
-              </a:ext>
-            </a:extLst>
-          </a:blip>
-          <a:stretch>
-            <a:fillRect/>
-          </a:stretch>
-        </p:blipFill>
-        <p:spPr>
-          <a:xfrm>
-            <a:off x="62144" y="112237"/>
-            <a:ext cx="588096" cy="1228523"/>
-          </a:xfrm>
-          <a:prstGeom prst="rect">
-            <a:avLst/>
-          </a:prstGeom>
-        </p:spPr>
-      </p:pic>
     </p:spTree>
     <p:extLst>
       <p:ext uri="{BB962C8B-B14F-4D97-AF65-F5344CB8AC3E}">
@@ -7081,7 +6670,7 @@
         <p:spPr>
           <a:xfrm>
             <a:off x="365760" y="6464808"/>
-            <a:ext cx="4828032" cy="310896"/>
+            <a:ext cx="7620000" cy="310896"/>
           </a:xfrm>
           <a:prstGeom prst="rect">
             <a:avLst/>
@@ -7100,7 +6689,7 @@
                   <a:srgbClr val="8A5C5E"/>
                 </a:solidFill>
               </a:rPr>
-              <a:t>Professor: Marcos Goulart Lima</a:t>
+              <a:t>CEA055 - Estatística e Probabilidade - Professor: Marcos Goulart Lima</a:t>
             </a:r>
           </a:p>
         </p:txBody>
@@ -7130,56 +6719,6 @@
           <a:chExt cx="0" cy="0"/>
         </a:xfrm>
       </p:grpSpPr>
-      <p:sp>
-        <p:nvSpPr>
-          <p:cNvPr id="2" name="Título 1">
-            <a:extLst>
-              <a:ext uri="{FF2B5EF4-FFF2-40B4-BE49-F238E27FC236}">
-                <a16:creationId xmlns:a16="http://schemas.microsoft.com/office/drawing/2014/main" id="{BC798918-7CB4-450A-A042-F0B538CA25DE}"/>
-              </a:ext>
-            </a:extLst>
-          </p:cNvPr>
-          <p:cNvSpPr>
-            <a:spLocks noGrp="1"/>
-          </p:cNvSpPr>
-          <p:nvPr>
-            <p:ph type="title"/>
-          </p:nvPr>
-        </p:nvSpPr>
-        <p:spPr>
-          <a:xfrm>
-            <a:off x="1032611" y="0"/>
-            <a:ext cx="10827959" cy="1574800"/>
-          </a:xfrm>
-        </p:spPr>
-        <p:txBody>
-          <a:bodyPr>
-            <a:normAutofit/>
-          </a:bodyPr>
-          <a:lstStyle/>
-          <a:p>
-            <a:pPr algn="ctr"/>
-            <a:r>
-              <a:rPr lang="pt-BR" dirty="0">
-                <a:latin typeface="AlternateGothic2 BT" panose="020B0608020202050204" pitchFamily="34" charset="0"/>
-              </a:rPr>
-              <a:t>CEA055 – Estatística e Probabilidade</a:t>
-            </a:r>
-            <a:br>
-              <a:rPr lang="pt-BR" dirty="0">
-                <a:latin typeface="AlternateGothic2 BT" panose="020B0608020202050204" pitchFamily="34" charset="0"/>
-              </a:rPr>
-            </a:br>
-            <a:r>
-              <a:rPr lang="pt-BR" sz="2200" b="1" dirty="0"/>
-              <a:t>Espaço Amostral e Eventos</a:t>
-            </a:r>
-            <a:endParaRPr lang="pt-BR" dirty="0">
-              <a:latin typeface="AlternateGothic2 BT" panose="020B0608020202050204" pitchFamily="34" charset="0"/>
-            </a:endParaRPr>
-          </a:p>
-        </p:txBody>
-      </p:sp>
       <mc:AlternateContent xmlns:mc="http://schemas.openxmlformats.org/markup-compatibility/2006" xmlns:a14="http://schemas.microsoft.com/office/drawing/2010/main">
         <mc:Choice Requires="a14">
           <p:sp>
@@ -7343,7 +6882,7 @@
         <p:spPr>
           <a:xfrm>
             <a:off x="361395" y="6488668"/>
-            <a:ext cx="2395336" cy="300210"/>
+            <a:ext cx="7620000" cy="300210"/>
           </a:xfrm>
           <a:prstGeom prst="rect">
             <a:avLst/>
@@ -7358,47 +6897,11 @@
           <a:p>
             <a:r>
               <a:rPr lang="pt-BR" sz="1351" dirty="0"/>
-              <a:t>Professor: Marcos Goulart Lima</a:t>
+              <a:t>CEA055 - Estatística e Probabilidade - Professor: Marcos Goulart Lima</a:t>
             </a:r>
           </a:p>
         </p:txBody>
       </p:sp>
-      <p:pic>
-        <p:nvPicPr>
-          <p:cNvPr id="8" name="Espaço Reservado para Conteúdo 4">
-            <a:extLst>
-              <a:ext uri="{FF2B5EF4-FFF2-40B4-BE49-F238E27FC236}">
-                <a16:creationId xmlns:a16="http://schemas.microsoft.com/office/drawing/2014/main" id="{65AB402D-D1A8-4F31-BA42-34A6F0FC69F9}"/>
-              </a:ext>
-            </a:extLst>
-          </p:cNvPr>
-          <p:cNvPicPr>
-            <a:picLocks noChangeAspect="1"/>
-          </p:cNvPicPr>
-          <p:nvPr/>
-        </p:nvPicPr>
-        <p:blipFill>
-          <a:blip r:embed="rId3">
-            <a:extLst>
-              <a:ext uri="{28A0092B-C50C-407E-A947-70E740481C1C}">
-                <a14:useLocalDpi xmlns:a14="http://schemas.microsoft.com/office/drawing/2010/main" val="0"/>
-              </a:ext>
-            </a:extLst>
-          </a:blip>
-          <a:stretch>
-            <a:fillRect/>
-          </a:stretch>
-        </p:blipFill>
-        <p:spPr>
-          <a:xfrm>
-            <a:off x="62144" y="112237"/>
-            <a:ext cx="588096" cy="1228523"/>
-          </a:xfrm>
-          <a:prstGeom prst="rect">
-            <a:avLst/>
-          </a:prstGeom>
-        </p:spPr>
-      </p:pic>
     </p:spTree>
     <p:extLst>
       <p:ext uri="{BB962C8B-B14F-4D97-AF65-F5344CB8AC3E}">
@@ -7431,56 +6934,6 @@
       </p:grpSpPr>
       <p:sp>
         <p:nvSpPr>
-          <p:cNvPr id="2" name="Título 1">
-            <a:extLst>
-              <a:ext uri="{FF2B5EF4-FFF2-40B4-BE49-F238E27FC236}">
-                <a16:creationId xmlns:a16="http://schemas.microsoft.com/office/drawing/2014/main" id="{BC798918-7CB4-450A-A042-F0B538CA25DE}"/>
-              </a:ext>
-            </a:extLst>
-          </p:cNvPr>
-          <p:cNvSpPr>
-            <a:spLocks noGrp="1"/>
-          </p:cNvSpPr>
-          <p:nvPr>
-            <p:ph type="title"/>
-          </p:nvPr>
-        </p:nvSpPr>
-        <p:spPr>
-          <a:xfrm>
-            <a:off x="1032611" y="0"/>
-            <a:ext cx="10827959" cy="1574800"/>
-          </a:xfrm>
-        </p:spPr>
-        <p:txBody>
-          <a:bodyPr>
-            <a:normAutofit/>
-          </a:bodyPr>
-          <a:lstStyle/>
-          <a:p>
-            <a:pPr algn="ctr"/>
-            <a:r>
-              <a:rPr lang="pt-BR" dirty="0">
-                <a:latin typeface="AlternateGothic2 BT" panose="020B0608020202050204" pitchFamily="34" charset="0"/>
-              </a:rPr>
-              <a:t>CEA055 – Estatística e Probabilidade</a:t>
-            </a:r>
-            <a:br>
-              <a:rPr lang="pt-BR" dirty="0">
-                <a:latin typeface="AlternateGothic2 BT" panose="020B0608020202050204" pitchFamily="34" charset="0"/>
-              </a:rPr>
-            </a:br>
-            <a:r>
-              <a:rPr lang="pt-BR" sz="2200" b="1" dirty="0"/>
-              <a:t>Espaço Amostral e Eventos</a:t>
-            </a:r>
-            <a:endParaRPr lang="pt-BR" dirty="0">
-              <a:latin typeface="AlternateGothic2 BT" panose="020B0608020202050204" pitchFamily="34" charset="0"/>
-            </a:endParaRPr>
-          </a:p>
-        </p:txBody>
-      </p:sp>
-      <p:sp>
-        <p:nvSpPr>
           <p:cNvPr id="6" name="CaixaDeTexto 5">
             <a:extLst>
               <a:ext uri="{FF2B5EF4-FFF2-40B4-BE49-F238E27FC236}">
@@ -7588,7 +7041,7 @@
         <p:spPr>
           <a:xfrm>
             <a:off x="361395" y="6488668"/>
-            <a:ext cx="2395336" cy="300210"/>
+            <a:ext cx="7620000" cy="300210"/>
           </a:xfrm>
           <a:prstGeom prst="rect">
             <a:avLst/>
@@ -7603,47 +7056,11 @@
           <a:p>
             <a:r>
               <a:rPr lang="pt-BR" sz="1351" dirty="0"/>
-              <a:t>Professor: Marcos Goulart Lima</a:t>
+              <a:t>CEA055 - Estatística e Probabilidade - Professor: Marcos Goulart Lima</a:t>
             </a:r>
           </a:p>
         </p:txBody>
       </p:sp>
-      <p:pic>
-        <p:nvPicPr>
-          <p:cNvPr id="8" name="Espaço Reservado para Conteúdo 4">
-            <a:extLst>
-              <a:ext uri="{FF2B5EF4-FFF2-40B4-BE49-F238E27FC236}">
-                <a16:creationId xmlns:a16="http://schemas.microsoft.com/office/drawing/2014/main" id="{65AB402D-D1A8-4F31-BA42-34A6F0FC69F9}"/>
-              </a:ext>
-            </a:extLst>
-          </p:cNvPr>
-          <p:cNvPicPr>
-            <a:picLocks noChangeAspect="1"/>
-          </p:cNvPicPr>
-          <p:nvPr/>
-        </p:nvPicPr>
-        <p:blipFill>
-          <a:blip r:embed="rId2">
-            <a:extLst>
-              <a:ext uri="{28A0092B-C50C-407E-A947-70E740481C1C}">
-                <a14:useLocalDpi xmlns:a14="http://schemas.microsoft.com/office/drawing/2010/main" val="0"/>
-              </a:ext>
-            </a:extLst>
-          </a:blip>
-          <a:stretch>
-            <a:fillRect/>
-          </a:stretch>
-        </p:blipFill>
-        <p:spPr>
-          <a:xfrm>
-            <a:off x="62144" y="112237"/>
-            <a:ext cx="588096" cy="1228523"/>
-          </a:xfrm>
-          <a:prstGeom prst="rect">
-            <a:avLst/>
-          </a:prstGeom>
-        </p:spPr>
-      </p:pic>
     </p:spTree>
     <p:extLst>
       <p:ext uri="{BB962C8B-B14F-4D97-AF65-F5344CB8AC3E}">
@@ -7676,56 +7093,6 @@
       </p:grpSpPr>
       <p:sp>
         <p:nvSpPr>
-          <p:cNvPr id="2" name="Título 1">
-            <a:extLst>
-              <a:ext uri="{FF2B5EF4-FFF2-40B4-BE49-F238E27FC236}">
-                <a16:creationId xmlns:a16="http://schemas.microsoft.com/office/drawing/2014/main" id="{BC798918-7CB4-450A-A042-F0B538CA25DE}"/>
-              </a:ext>
-            </a:extLst>
-          </p:cNvPr>
-          <p:cNvSpPr>
-            <a:spLocks noGrp="1"/>
-          </p:cNvSpPr>
-          <p:nvPr>
-            <p:ph type="title"/>
-          </p:nvPr>
-        </p:nvSpPr>
-        <p:spPr>
-          <a:xfrm>
-            <a:off x="1032611" y="0"/>
-            <a:ext cx="10827959" cy="1574800"/>
-          </a:xfrm>
-        </p:spPr>
-        <p:txBody>
-          <a:bodyPr>
-            <a:normAutofit/>
-          </a:bodyPr>
-          <a:lstStyle/>
-          <a:p>
-            <a:pPr algn="ctr"/>
-            <a:r>
-              <a:rPr lang="pt-BR" dirty="0">
-                <a:latin typeface="AlternateGothic2 BT" panose="020B0608020202050204" pitchFamily="34" charset="0"/>
-              </a:rPr>
-              <a:t>CEA055 – Estatística e Probabilidade</a:t>
-            </a:r>
-            <a:br>
-              <a:rPr lang="pt-BR" dirty="0">
-                <a:latin typeface="AlternateGothic2 BT" panose="020B0608020202050204" pitchFamily="34" charset="0"/>
-              </a:rPr>
-            </a:br>
-            <a:r>
-              <a:rPr lang="pt-BR" sz="2200" b="1" dirty="0"/>
-              <a:t>Espaço Amostral e Eventos</a:t>
-            </a:r>
-            <a:endParaRPr lang="pt-BR" dirty="0">
-              <a:latin typeface="AlternateGothic2 BT" panose="020B0608020202050204" pitchFamily="34" charset="0"/>
-            </a:endParaRPr>
-          </a:p>
-        </p:txBody>
-      </p:sp>
-      <p:sp>
-        <p:nvSpPr>
           <p:cNvPr id="6" name="CaixaDeTexto 5">
             <a:extLst>
               <a:ext uri="{FF2B5EF4-FFF2-40B4-BE49-F238E27FC236}">
@@ -7819,7 +7186,7 @@
         <p:spPr>
           <a:xfrm>
             <a:off x="361395" y="6488668"/>
-            <a:ext cx="2395336" cy="300210"/>
+            <a:ext cx="7620000" cy="300210"/>
           </a:xfrm>
           <a:prstGeom prst="rect">
             <a:avLst/>
@@ -7834,47 +7201,11 @@
           <a:p>
             <a:r>
               <a:rPr lang="pt-BR" sz="1351" dirty="0"/>
-              <a:t>Professor: Marcos Goulart Lima</a:t>
+              <a:t>CEA055 - Estatística e Probabilidade - Professor: Marcos Goulart Lima</a:t>
             </a:r>
           </a:p>
         </p:txBody>
       </p:sp>
-      <p:pic>
-        <p:nvPicPr>
-          <p:cNvPr id="8" name="Espaço Reservado para Conteúdo 4">
-            <a:extLst>
-              <a:ext uri="{FF2B5EF4-FFF2-40B4-BE49-F238E27FC236}">
-                <a16:creationId xmlns:a16="http://schemas.microsoft.com/office/drawing/2014/main" id="{65AB402D-D1A8-4F31-BA42-34A6F0FC69F9}"/>
-              </a:ext>
-            </a:extLst>
-          </p:cNvPr>
-          <p:cNvPicPr>
-            <a:picLocks noChangeAspect="1"/>
-          </p:cNvPicPr>
-          <p:nvPr/>
-        </p:nvPicPr>
-        <p:blipFill>
-          <a:blip r:embed="rId2">
-            <a:extLst>
-              <a:ext uri="{28A0092B-C50C-407E-A947-70E740481C1C}">
-                <a14:useLocalDpi xmlns:a14="http://schemas.microsoft.com/office/drawing/2010/main" val="0"/>
-              </a:ext>
-            </a:extLst>
-          </a:blip>
-          <a:stretch>
-            <a:fillRect/>
-          </a:stretch>
-        </p:blipFill>
-        <p:spPr>
-          <a:xfrm>
-            <a:off x="62144" y="112237"/>
-            <a:ext cx="588096" cy="1228523"/>
-          </a:xfrm>
-          <a:prstGeom prst="rect">
-            <a:avLst/>
-          </a:prstGeom>
-        </p:spPr>
-      </p:pic>
     </p:spTree>
     <p:extLst>
       <p:ext uri="{BB962C8B-B14F-4D97-AF65-F5344CB8AC3E}">
@@ -7905,68 +7236,6 @@
           <a:chExt cx="0" cy="0"/>
         </a:xfrm>
       </p:grpSpPr>
-      <p:sp>
-        <p:nvSpPr>
-          <p:cNvPr id="2" name="Título 1">
-            <a:extLst>
-              <a:ext uri="{FF2B5EF4-FFF2-40B4-BE49-F238E27FC236}">
-                <a16:creationId xmlns:a16="http://schemas.microsoft.com/office/drawing/2014/main" id="{BC798918-7CB4-450A-A042-F0B538CA25DE}"/>
-              </a:ext>
-            </a:extLst>
-          </p:cNvPr>
-          <p:cNvSpPr>
-            <a:spLocks noGrp="1"/>
-          </p:cNvSpPr>
-          <p:nvPr>
-            <p:ph type="title"/>
-          </p:nvPr>
-        </p:nvSpPr>
-        <p:spPr>
-          <a:xfrm>
-            <a:off x="1032611" y="0"/>
-            <a:ext cx="10827959" cy="1574800"/>
-          </a:xfrm>
-        </p:spPr>
-        <p:txBody>
-          <a:bodyPr>
-            <a:normAutofit/>
-          </a:bodyPr>
-          <a:lstStyle/>
-          <a:p>
-            <a:pPr algn="ctr"/>
-            <a:r>
-              <a:rPr lang="pt-BR">
-                <a:latin typeface="AlternateGothic2 BT" panose="020B0608020202050204" pitchFamily="34" charset="0"/>
-              </a:rPr>
-              <a:t>CEA055 </a:t>
-            </a:r>
-            <a:r>
-              <a:rPr lang="pt-BR" dirty="0">
-                <a:latin typeface="AlternateGothic2 BT" panose="020B0608020202050204" pitchFamily="34" charset="0"/>
-              </a:rPr>
-              <a:t>– Estatística e Probabilidade</a:t>
-            </a:r>
-            <a:br>
-              <a:rPr lang="pt-BR" dirty="0">
-                <a:latin typeface="AlternateGothic2 BT" panose="020B0608020202050204" pitchFamily="34" charset="0"/>
-              </a:rPr>
-            </a:br>
-            <a:r>
-              <a:rPr lang="pt-BR" sz="2200" dirty="0">
-                <a:latin typeface="AlternateGothic2 BT" panose="020B0608020202050204" pitchFamily="34" charset="0"/>
-              </a:rPr>
-              <a:t>E</a:t>
-            </a:r>
-            <a:r>
-              <a:rPr lang="pt-BR" sz="2200" b="1" dirty="0"/>
-              <a:t>spaço Amostral e Eventos</a:t>
-            </a:r>
-            <a:endParaRPr lang="pt-BR" dirty="0">
-              <a:latin typeface="AlternateGothic2 BT" panose="020B0608020202050204" pitchFamily="34" charset="0"/>
-            </a:endParaRPr>
-          </a:p>
-        </p:txBody>
-      </p:sp>
       <mc:AlternateContent xmlns:mc="http://schemas.openxmlformats.org/markup-compatibility/2006" xmlns:a14="http://schemas.microsoft.com/office/drawing/2010/main">
         <mc:Choice Requires="a14">
           <p:sp>
@@ -8165,7 +7434,7 @@
         <p:spPr>
           <a:xfrm>
             <a:off x="361395" y="6488668"/>
-            <a:ext cx="2395336" cy="300210"/>
+            <a:ext cx="7620000" cy="300210"/>
           </a:xfrm>
           <a:prstGeom prst="rect">
             <a:avLst/>
@@ -8180,47 +7449,11 @@
           <a:p>
             <a:r>
               <a:rPr lang="pt-BR" sz="1351" dirty="0"/>
-              <a:t>Professor: Marcos Goulart Lima</a:t>
+              <a:t>CEA055 - Estatística e Probabilidade - Professor: Marcos Goulart Lima</a:t>
             </a:r>
           </a:p>
         </p:txBody>
       </p:sp>
-      <p:pic>
-        <p:nvPicPr>
-          <p:cNvPr id="8" name="Espaço Reservado para Conteúdo 4">
-            <a:extLst>
-              <a:ext uri="{FF2B5EF4-FFF2-40B4-BE49-F238E27FC236}">
-                <a16:creationId xmlns:a16="http://schemas.microsoft.com/office/drawing/2014/main" id="{65AB402D-D1A8-4F31-BA42-34A6F0FC69F9}"/>
-              </a:ext>
-            </a:extLst>
-          </p:cNvPr>
-          <p:cNvPicPr>
-            <a:picLocks noChangeAspect="1"/>
-          </p:cNvPicPr>
-          <p:nvPr/>
-        </p:nvPicPr>
-        <p:blipFill>
-          <a:blip r:embed="rId3">
-            <a:extLst>
-              <a:ext uri="{28A0092B-C50C-407E-A947-70E740481C1C}">
-                <a14:useLocalDpi xmlns:a14="http://schemas.microsoft.com/office/drawing/2010/main" val="0"/>
-              </a:ext>
-            </a:extLst>
-          </a:blip>
-          <a:stretch>
-            <a:fillRect/>
-          </a:stretch>
-        </p:blipFill>
-        <p:spPr>
-          <a:xfrm>
-            <a:off x="62144" y="112237"/>
-            <a:ext cx="588096" cy="1228523"/>
-          </a:xfrm>
-          <a:prstGeom prst="rect">
-            <a:avLst/>
-          </a:prstGeom>
-        </p:spPr>
-      </p:pic>
     </p:spTree>
     <p:extLst>
       <p:ext uri="{BB962C8B-B14F-4D97-AF65-F5344CB8AC3E}">
@@ -8253,56 +7486,6 @@
       </p:grpSpPr>
       <p:sp>
         <p:nvSpPr>
-          <p:cNvPr id="2" name="Título 1">
-            <a:extLst>
-              <a:ext uri="{FF2B5EF4-FFF2-40B4-BE49-F238E27FC236}">
-                <a16:creationId xmlns:a16="http://schemas.microsoft.com/office/drawing/2014/main" id="{BC798918-7CB4-450A-A042-F0B538CA25DE}"/>
-              </a:ext>
-            </a:extLst>
-          </p:cNvPr>
-          <p:cNvSpPr>
-            <a:spLocks noGrp="1"/>
-          </p:cNvSpPr>
-          <p:nvPr>
-            <p:ph type="title"/>
-          </p:nvPr>
-        </p:nvSpPr>
-        <p:spPr>
-          <a:xfrm>
-            <a:off x="1032611" y="0"/>
-            <a:ext cx="10827959" cy="1574800"/>
-          </a:xfrm>
-        </p:spPr>
-        <p:txBody>
-          <a:bodyPr>
-            <a:normAutofit/>
-          </a:bodyPr>
-          <a:lstStyle/>
-          <a:p>
-            <a:pPr algn="ctr"/>
-            <a:r>
-              <a:rPr lang="pt-BR" dirty="0">
-                <a:latin typeface="AlternateGothic2 BT" panose="020B0608020202050204" pitchFamily="34" charset="0"/>
-              </a:rPr>
-              <a:t>CEA055 – Estatística e Probabilidade</a:t>
-            </a:r>
-            <a:br>
-              <a:rPr lang="pt-BR" dirty="0">
-                <a:latin typeface="AlternateGothic2 BT" panose="020B0608020202050204" pitchFamily="34" charset="0"/>
-              </a:rPr>
-            </a:br>
-            <a:r>
-              <a:rPr lang="pt-BR" sz="2200" b="1" dirty="0"/>
-              <a:t>Espaço Amostral e Eventos</a:t>
-            </a:r>
-            <a:endParaRPr lang="pt-BR" dirty="0">
-              <a:latin typeface="AlternateGothic2 BT" panose="020B0608020202050204" pitchFamily="34" charset="0"/>
-            </a:endParaRPr>
-          </a:p>
-        </p:txBody>
-      </p:sp>
-      <p:sp>
-        <p:nvSpPr>
           <p:cNvPr id="6" name="CaixaDeTexto 5">
             <a:extLst>
               <a:ext uri="{FF2B5EF4-FFF2-40B4-BE49-F238E27FC236}">
@@ -8390,7 +7573,7 @@
         <p:spPr>
           <a:xfrm>
             <a:off x="361395" y="6488668"/>
-            <a:ext cx="2395336" cy="300210"/>
+            <a:ext cx="7620000" cy="300210"/>
           </a:xfrm>
           <a:prstGeom prst="rect">
             <a:avLst/>
@@ -8405,47 +7588,11 @@
           <a:p>
             <a:r>
               <a:rPr lang="pt-BR" sz="1351" dirty="0"/>
-              <a:t>Professor: Marcos Goulart Lima</a:t>
+              <a:t>CEA055 - Estatística e Probabilidade - Professor: Marcos Goulart Lima</a:t>
             </a:r>
           </a:p>
         </p:txBody>
       </p:sp>
-      <p:pic>
-        <p:nvPicPr>
-          <p:cNvPr id="8" name="Espaço Reservado para Conteúdo 4">
-            <a:extLst>
-              <a:ext uri="{FF2B5EF4-FFF2-40B4-BE49-F238E27FC236}">
-                <a16:creationId xmlns:a16="http://schemas.microsoft.com/office/drawing/2014/main" id="{65AB402D-D1A8-4F31-BA42-34A6F0FC69F9}"/>
-              </a:ext>
-            </a:extLst>
-          </p:cNvPr>
-          <p:cNvPicPr>
-            <a:picLocks noChangeAspect="1"/>
-          </p:cNvPicPr>
-          <p:nvPr/>
-        </p:nvPicPr>
-        <p:blipFill>
-          <a:blip r:embed="rId3">
-            <a:extLst>
-              <a:ext uri="{28A0092B-C50C-407E-A947-70E740481C1C}">
-                <a14:useLocalDpi xmlns:a14="http://schemas.microsoft.com/office/drawing/2010/main" val="0"/>
-              </a:ext>
-            </a:extLst>
-          </a:blip>
-          <a:stretch>
-            <a:fillRect/>
-          </a:stretch>
-        </p:blipFill>
-        <p:spPr>
-          <a:xfrm>
-            <a:off x="62144" y="112237"/>
-            <a:ext cx="588096" cy="1228523"/>
-          </a:xfrm>
-          <a:prstGeom prst="rect">
-            <a:avLst/>
-          </a:prstGeom>
-        </p:spPr>
-      </p:pic>
     </p:spTree>
     <p:extLst>
       <p:ext uri="{BB962C8B-B14F-4D97-AF65-F5344CB8AC3E}">
@@ -8650,7 +7797,7 @@
         <p:spPr>
           <a:xfrm>
             <a:off x="365760" y="6464808"/>
-            <a:ext cx="4828032" cy="310896"/>
+            <a:ext cx="7620000" cy="310896"/>
           </a:xfrm>
           <a:prstGeom prst="rect">
             <a:avLst/>
@@ -8669,7 +7816,7 @@
                   <a:srgbClr val="8A5C5E"/>
                 </a:solidFill>
               </a:rPr>
-              <a:t>Professor: Marcos Goulart Lima</a:t>
+              <a:t>CEA055 - Estatística e Probabilidade - Professor: Marcos Goulart Lima</a:t>
             </a:r>
           </a:p>
         </p:txBody>
@@ -8699,56 +7846,6 @@
           <a:chExt cx="0" cy="0"/>
         </a:xfrm>
       </p:grpSpPr>
-      <p:sp>
-        <p:nvSpPr>
-          <p:cNvPr id="2" name="Título 1">
-            <a:extLst>
-              <a:ext uri="{FF2B5EF4-FFF2-40B4-BE49-F238E27FC236}">
-                <a16:creationId xmlns:a16="http://schemas.microsoft.com/office/drawing/2014/main" id="{BC798918-7CB4-450A-A042-F0B538CA25DE}"/>
-              </a:ext>
-            </a:extLst>
-          </p:cNvPr>
-          <p:cNvSpPr>
-            <a:spLocks noGrp="1"/>
-          </p:cNvSpPr>
-          <p:nvPr>
-            <p:ph type="title"/>
-          </p:nvPr>
-        </p:nvSpPr>
-        <p:spPr>
-          <a:xfrm>
-            <a:off x="1032611" y="0"/>
-            <a:ext cx="10827959" cy="1574800"/>
-          </a:xfrm>
-        </p:spPr>
-        <p:txBody>
-          <a:bodyPr>
-            <a:normAutofit/>
-          </a:bodyPr>
-          <a:lstStyle/>
-          <a:p>
-            <a:pPr algn="ctr"/>
-            <a:r>
-              <a:rPr lang="pt-BR" dirty="0">
-                <a:latin typeface="AlternateGothic2 BT" panose="020B0608020202050204" pitchFamily="34" charset="0"/>
-              </a:rPr>
-              <a:t>CEA055 – Estatística e Probabilidade</a:t>
-            </a:r>
-            <a:br>
-              <a:rPr lang="pt-BR" dirty="0">
-                <a:latin typeface="AlternateGothic2 BT" panose="020B0608020202050204" pitchFamily="34" charset="0"/>
-              </a:rPr>
-            </a:br>
-            <a:r>
-              <a:rPr lang="pt-BR" sz="2200" b="1" dirty="0"/>
-              <a:t>Espaço Amostral e Eventos</a:t>
-            </a:r>
-            <a:endParaRPr lang="pt-BR" dirty="0">
-              <a:latin typeface="AlternateGothic2 BT" panose="020B0608020202050204" pitchFamily="34" charset="0"/>
-            </a:endParaRPr>
-          </a:p>
-        </p:txBody>
-      </p:sp>
       <mc:AlternateContent xmlns:mc="http://schemas.openxmlformats.org/markup-compatibility/2006" xmlns:a14="http://schemas.microsoft.com/office/drawing/2010/main">
         <mc:Choice Requires="a14">
           <p:sp>
@@ -9004,7 +8101,7 @@
         <p:spPr>
           <a:xfrm>
             <a:off x="361395" y="6488668"/>
-            <a:ext cx="2395336" cy="300210"/>
+            <a:ext cx="7620000" cy="300210"/>
           </a:xfrm>
           <a:prstGeom prst="rect">
             <a:avLst/>
@@ -9019,47 +8116,11 @@
           <a:p>
             <a:r>
               <a:rPr lang="pt-BR" sz="1351" dirty="0"/>
-              <a:t>Professor: Marcos Goulart Lima</a:t>
+              <a:t>CEA055 - Estatística e Probabilidade - Professor: Marcos Goulart Lima</a:t>
             </a:r>
           </a:p>
         </p:txBody>
       </p:sp>
-      <p:pic>
-        <p:nvPicPr>
-          <p:cNvPr id="8" name="Espaço Reservado para Conteúdo 4">
-            <a:extLst>
-              <a:ext uri="{FF2B5EF4-FFF2-40B4-BE49-F238E27FC236}">
-                <a16:creationId xmlns:a16="http://schemas.microsoft.com/office/drawing/2014/main" id="{65AB402D-D1A8-4F31-BA42-34A6F0FC69F9}"/>
-              </a:ext>
-            </a:extLst>
-          </p:cNvPr>
-          <p:cNvPicPr>
-            <a:picLocks noChangeAspect="1"/>
-          </p:cNvPicPr>
-          <p:nvPr/>
-        </p:nvPicPr>
-        <p:blipFill>
-          <a:blip r:embed="rId3">
-            <a:extLst>
-              <a:ext uri="{28A0092B-C50C-407E-A947-70E740481C1C}">
-                <a14:useLocalDpi xmlns:a14="http://schemas.microsoft.com/office/drawing/2010/main" val="0"/>
-              </a:ext>
-            </a:extLst>
-          </a:blip>
-          <a:stretch>
-            <a:fillRect/>
-          </a:stretch>
-        </p:blipFill>
-        <p:spPr>
-          <a:xfrm>
-            <a:off x="62144" y="112237"/>
-            <a:ext cx="588096" cy="1228523"/>
-          </a:xfrm>
-          <a:prstGeom prst="rect">
-            <a:avLst/>
-          </a:prstGeom>
-        </p:spPr>
-      </p:pic>
     </p:spTree>
     <p:extLst>
       <p:ext uri="{BB962C8B-B14F-4D97-AF65-F5344CB8AC3E}">
@@ -9090,56 +8151,6 @@
           <a:chExt cx="0" cy="0"/>
         </a:xfrm>
       </p:grpSpPr>
-      <p:sp>
-        <p:nvSpPr>
-          <p:cNvPr id="2" name="Título 1">
-            <a:extLst>
-              <a:ext uri="{FF2B5EF4-FFF2-40B4-BE49-F238E27FC236}">
-                <a16:creationId xmlns:a16="http://schemas.microsoft.com/office/drawing/2014/main" id="{BC798918-7CB4-450A-A042-F0B538CA25DE}"/>
-              </a:ext>
-            </a:extLst>
-          </p:cNvPr>
-          <p:cNvSpPr>
-            <a:spLocks noGrp="1"/>
-          </p:cNvSpPr>
-          <p:nvPr>
-            <p:ph type="title"/>
-          </p:nvPr>
-        </p:nvSpPr>
-        <p:spPr>
-          <a:xfrm>
-            <a:off x="1032611" y="0"/>
-            <a:ext cx="10827959" cy="1574800"/>
-          </a:xfrm>
-        </p:spPr>
-        <p:txBody>
-          <a:bodyPr>
-            <a:normAutofit/>
-          </a:bodyPr>
-          <a:lstStyle/>
-          <a:p>
-            <a:pPr algn="ctr"/>
-            <a:r>
-              <a:rPr lang="pt-BR" dirty="0">
-                <a:latin typeface="AlternateGothic2 BT" panose="020B0608020202050204" pitchFamily="34" charset="0"/>
-              </a:rPr>
-              <a:t>CEA055 – Estatística e Probabilidade</a:t>
-            </a:r>
-            <a:br>
-              <a:rPr lang="pt-BR" dirty="0">
-                <a:latin typeface="AlternateGothic2 BT" panose="020B0608020202050204" pitchFamily="34" charset="0"/>
-              </a:rPr>
-            </a:br>
-            <a:r>
-              <a:rPr lang="pt-BR" sz="2200" b="1" dirty="0"/>
-              <a:t>Espaço Amostral e Eventos</a:t>
-            </a:r>
-            <a:endParaRPr lang="pt-BR" dirty="0">
-              <a:latin typeface="AlternateGothic2 BT" panose="020B0608020202050204" pitchFamily="34" charset="0"/>
-            </a:endParaRPr>
-          </a:p>
-        </p:txBody>
-      </p:sp>
       <mc:AlternateContent xmlns:mc="http://schemas.openxmlformats.org/markup-compatibility/2006" xmlns:a14="http://schemas.microsoft.com/office/drawing/2010/main">
         <mc:Choice Requires="a14">
           <p:sp>
@@ -9430,7 +8441,7 @@
         <p:spPr>
           <a:xfrm>
             <a:off x="361395" y="6488668"/>
-            <a:ext cx="2395336" cy="300210"/>
+            <a:ext cx="7620000" cy="300210"/>
           </a:xfrm>
           <a:prstGeom prst="rect">
             <a:avLst/>
@@ -9445,47 +8456,11 @@
           <a:p>
             <a:r>
               <a:rPr lang="pt-BR" sz="1351" dirty="0"/>
-              <a:t>Professor: Marcos Goulart Lima</a:t>
+              <a:t>CEA055 - Estatística e Probabilidade - Professor: Marcos Goulart Lima</a:t>
             </a:r>
           </a:p>
         </p:txBody>
       </p:sp>
-      <p:pic>
-        <p:nvPicPr>
-          <p:cNvPr id="8" name="Espaço Reservado para Conteúdo 4">
-            <a:extLst>
-              <a:ext uri="{FF2B5EF4-FFF2-40B4-BE49-F238E27FC236}">
-                <a16:creationId xmlns:a16="http://schemas.microsoft.com/office/drawing/2014/main" id="{65AB402D-D1A8-4F31-BA42-34A6F0FC69F9}"/>
-              </a:ext>
-            </a:extLst>
-          </p:cNvPr>
-          <p:cNvPicPr>
-            <a:picLocks noChangeAspect="1"/>
-          </p:cNvPicPr>
-          <p:nvPr/>
-        </p:nvPicPr>
-        <p:blipFill>
-          <a:blip r:embed="rId3">
-            <a:extLst>
-              <a:ext uri="{28A0092B-C50C-407E-A947-70E740481C1C}">
-                <a14:useLocalDpi xmlns:a14="http://schemas.microsoft.com/office/drawing/2010/main" val="0"/>
-              </a:ext>
-            </a:extLst>
-          </a:blip>
-          <a:stretch>
-            <a:fillRect/>
-          </a:stretch>
-        </p:blipFill>
-        <p:spPr>
-          <a:xfrm>
-            <a:off x="62144" y="112237"/>
-            <a:ext cx="588096" cy="1228523"/>
-          </a:xfrm>
-          <a:prstGeom prst="rect">
-            <a:avLst/>
-          </a:prstGeom>
-        </p:spPr>
-      </p:pic>
     </p:spTree>
     <p:extLst>
       <p:ext uri="{BB962C8B-B14F-4D97-AF65-F5344CB8AC3E}">
@@ -9516,56 +8491,6 @@
           <a:chExt cx="0" cy="0"/>
         </a:xfrm>
       </p:grpSpPr>
-      <p:sp>
-        <p:nvSpPr>
-          <p:cNvPr id="2" name="Título 1">
-            <a:extLst>
-              <a:ext uri="{FF2B5EF4-FFF2-40B4-BE49-F238E27FC236}">
-                <a16:creationId xmlns:a16="http://schemas.microsoft.com/office/drawing/2014/main" id="{BC798918-7CB4-450A-A042-F0B538CA25DE}"/>
-              </a:ext>
-            </a:extLst>
-          </p:cNvPr>
-          <p:cNvSpPr>
-            <a:spLocks noGrp="1"/>
-          </p:cNvSpPr>
-          <p:nvPr>
-            <p:ph type="title"/>
-          </p:nvPr>
-        </p:nvSpPr>
-        <p:spPr>
-          <a:xfrm>
-            <a:off x="1032611" y="0"/>
-            <a:ext cx="10827959" cy="1574800"/>
-          </a:xfrm>
-        </p:spPr>
-        <p:txBody>
-          <a:bodyPr>
-            <a:normAutofit/>
-          </a:bodyPr>
-          <a:lstStyle/>
-          <a:p>
-            <a:pPr algn="ctr"/>
-            <a:r>
-              <a:rPr lang="pt-BR" dirty="0">
-                <a:latin typeface="AlternateGothic2 BT" panose="020B0608020202050204" pitchFamily="34" charset="0"/>
-              </a:rPr>
-              <a:t>CEA055 – Estatística e Probabilidade</a:t>
-            </a:r>
-            <a:br>
-              <a:rPr lang="pt-BR" dirty="0">
-                <a:latin typeface="AlternateGothic2 BT" panose="020B0608020202050204" pitchFamily="34" charset="0"/>
-              </a:rPr>
-            </a:br>
-            <a:r>
-              <a:rPr lang="pt-BR" sz="2200" b="1" dirty="0"/>
-              <a:t>Espaço Amostral e Eventos</a:t>
-            </a:r>
-            <a:endParaRPr lang="pt-BR" dirty="0">
-              <a:latin typeface="AlternateGothic2 BT" panose="020B0608020202050204" pitchFamily="34" charset="0"/>
-            </a:endParaRPr>
-          </a:p>
-        </p:txBody>
-      </p:sp>
       <mc:AlternateContent xmlns:mc="http://schemas.openxmlformats.org/markup-compatibility/2006" xmlns:a14="http://schemas.microsoft.com/office/drawing/2010/main">
         <mc:Choice Requires="a14">
           <p:sp>
@@ -10113,7 +9038,7 @@
         <p:spPr>
           <a:xfrm>
             <a:off x="361395" y="6488668"/>
-            <a:ext cx="2395336" cy="300210"/>
+            <a:ext cx="7620000" cy="300210"/>
           </a:xfrm>
           <a:prstGeom prst="rect">
             <a:avLst/>
@@ -10128,47 +9053,11 @@
           <a:p>
             <a:r>
               <a:rPr lang="pt-BR" sz="1351" dirty="0"/>
-              <a:t>Professor: Marcos Goulart Lima</a:t>
+              <a:t>CEA055 - Estatística e Probabilidade - Professor: Marcos Goulart Lima</a:t>
             </a:r>
           </a:p>
         </p:txBody>
       </p:sp>
-      <p:pic>
-        <p:nvPicPr>
-          <p:cNvPr id="8" name="Espaço Reservado para Conteúdo 4">
-            <a:extLst>
-              <a:ext uri="{FF2B5EF4-FFF2-40B4-BE49-F238E27FC236}">
-                <a16:creationId xmlns:a16="http://schemas.microsoft.com/office/drawing/2014/main" id="{65AB402D-D1A8-4F31-BA42-34A6F0FC69F9}"/>
-              </a:ext>
-            </a:extLst>
-          </p:cNvPr>
-          <p:cNvPicPr>
-            <a:picLocks noChangeAspect="1"/>
-          </p:cNvPicPr>
-          <p:nvPr/>
-        </p:nvPicPr>
-        <p:blipFill>
-          <a:blip r:embed="rId3">
-            <a:extLst>
-              <a:ext uri="{28A0092B-C50C-407E-A947-70E740481C1C}">
-                <a14:useLocalDpi xmlns:a14="http://schemas.microsoft.com/office/drawing/2010/main" val="0"/>
-              </a:ext>
-            </a:extLst>
-          </a:blip>
-          <a:stretch>
-            <a:fillRect/>
-          </a:stretch>
-        </p:blipFill>
-        <p:spPr>
-          <a:xfrm>
-            <a:off x="62144" y="112237"/>
-            <a:ext cx="588096" cy="1228523"/>
-          </a:xfrm>
-          <a:prstGeom prst="rect">
-            <a:avLst/>
-          </a:prstGeom>
-        </p:spPr>
-      </p:pic>
       <p:pic>
         <p:nvPicPr>
           <p:cNvPr id="5" name="Imagem 4">
@@ -10184,7 +9073,7 @@
           <p:nvPr/>
         </p:nvPicPr>
         <p:blipFill>
-          <a:blip r:embed="rId4"/>
+          <a:blip r:embed="rId3"/>
           <a:stretch>
             <a:fillRect/>
           </a:stretch>
@@ -10229,56 +9118,6 @@
           <a:chExt cx="0" cy="0"/>
         </a:xfrm>
       </p:grpSpPr>
-      <p:sp>
-        <p:nvSpPr>
-          <p:cNvPr id="2" name="Título 1">
-            <a:extLst>
-              <a:ext uri="{FF2B5EF4-FFF2-40B4-BE49-F238E27FC236}">
-                <a16:creationId xmlns:a16="http://schemas.microsoft.com/office/drawing/2014/main" id="{BC798918-7CB4-450A-A042-F0B538CA25DE}"/>
-              </a:ext>
-            </a:extLst>
-          </p:cNvPr>
-          <p:cNvSpPr>
-            <a:spLocks noGrp="1"/>
-          </p:cNvSpPr>
-          <p:nvPr>
-            <p:ph type="title"/>
-          </p:nvPr>
-        </p:nvSpPr>
-        <p:spPr>
-          <a:xfrm>
-            <a:off x="1032611" y="0"/>
-            <a:ext cx="10827959" cy="1574800"/>
-          </a:xfrm>
-        </p:spPr>
-        <p:txBody>
-          <a:bodyPr>
-            <a:normAutofit/>
-          </a:bodyPr>
-          <a:lstStyle/>
-          <a:p>
-            <a:pPr algn="ctr"/>
-            <a:r>
-              <a:rPr lang="pt-BR" dirty="0">
-                <a:latin typeface="AlternateGothic2 BT" panose="020B0608020202050204" pitchFamily="34" charset="0"/>
-              </a:rPr>
-              <a:t>CEA055 – Estatística e Probabilidade</a:t>
-            </a:r>
-            <a:br>
-              <a:rPr lang="pt-BR" dirty="0">
-                <a:latin typeface="AlternateGothic2 BT" panose="020B0608020202050204" pitchFamily="34" charset="0"/>
-              </a:rPr>
-            </a:br>
-            <a:r>
-              <a:rPr lang="pt-BR" sz="2200" b="1" dirty="0"/>
-              <a:t>Espaço Amostral e Eventos</a:t>
-            </a:r>
-            <a:endParaRPr lang="pt-BR" dirty="0">
-              <a:latin typeface="AlternateGothic2 BT" panose="020B0608020202050204" pitchFamily="34" charset="0"/>
-            </a:endParaRPr>
-          </a:p>
-        </p:txBody>
-      </p:sp>
       <mc:AlternateContent xmlns:mc="http://schemas.openxmlformats.org/markup-compatibility/2006" xmlns:a14="http://schemas.microsoft.com/office/drawing/2010/main">
         <mc:Choice Requires="a14">
           <p:sp>
@@ -10857,7 +9696,7 @@
         <p:spPr>
           <a:xfrm>
             <a:off x="361395" y="6488668"/>
-            <a:ext cx="2395336" cy="300210"/>
+            <a:ext cx="7620000" cy="300210"/>
           </a:xfrm>
           <a:prstGeom prst="rect">
             <a:avLst/>
@@ -10872,47 +9711,11 @@
           <a:p>
             <a:r>
               <a:rPr lang="pt-BR" sz="1351" dirty="0"/>
-              <a:t>Professor: Marcos Goulart Lima</a:t>
+              <a:t>CEA055 - Estatística e Probabilidade - Professor: Marcos Goulart Lima</a:t>
             </a:r>
           </a:p>
         </p:txBody>
       </p:sp>
-      <p:pic>
-        <p:nvPicPr>
-          <p:cNvPr id="8" name="Espaço Reservado para Conteúdo 4">
-            <a:extLst>
-              <a:ext uri="{FF2B5EF4-FFF2-40B4-BE49-F238E27FC236}">
-                <a16:creationId xmlns:a16="http://schemas.microsoft.com/office/drawing/2014/main" id="{65AB402D-D1A8-4F31-BA42-34A6F0FC69F9}"/>
-              </a:ext>
-            </a:extLst>
-          </p:cNvPr>
-          <p:cNvPicPr>
-            <a:picLocks noChangeAspect="1"/>
-          </p:cNvPicPr>
-          <p:nvPr/>
-        </p:nvPicPr>
-        <p:blipFill>
-          <a:blip r:embed="rId3">
-            <a:extLst>
-              <a:ext uri="{28A0092B-C50C-407E-A947-70E740481C1C}">
-                <a14:useLocalDpi xmlns:a14="http://schemas.microsoft.com/office/drawing/2010/main" val="0"/>
-              </a:ext>
-            </a:extLst>
-          </a:blip>
-          <a:stretch>
-            <a:fillRect/>
-          </a:stretch>
-        </p:blipFill>
-        <p:spPr>
-          <a:xfrm>
-            <a:off x="62144" y="112237"/>
-            <a:ext cx="588096" cy="1228523"/>
-          </a:xfrm>
-          <a:prstGeom prst="rect">
-            <a:avLst/>
-          </a:prstGeom>
-        </p:spPr>
-      </p:pic>
     </p:spTree>
     <p:extLst>
       <p:ext uri="{BB962C8B-B14F-4D97-AF65-F5344CB8AC3E}">
@@ -10945,56 +9748,6 @@
       </p:grpSpPr>
       <p:sp>
         <p:nvSpPr>
-          <p:cNvPr id="2" name="Título 1">
-            <a:extLst>
-              <a:ext uri="{FF2B5EF4-FFF2-40B4-BE49-F238E27FC236}">
-                <a16:creationId xmlns:a16="http://schemas.microsoft.com/office/drawing/2014/main" id="{BC798918-7CB4-450A-A042-F0B538CA25DE}"/>
-              </a:ext>
-            </a:extLst>
-          </p:cNvPr>
-          <p:cNvSpPr>
-            <a:spLocks noGrp="1"/>
-          </p:cNvSpPr>
-          <p:nvPr>
-            <p:ph type="title"/>
-          </p:nvPr>
-        </p:nvSpPr>
-        <p:spPr>
-          <a:xfrm>
-            <a:off x="1032611" y="0"/>
-            <a:ext cx="10827959" cy="1574800"/>
-          </a:xfrm>
-        </p:spPr>
-        <p:txBody>
-          <a:bodyPr>
-            <a:normAutofit/>
-          </a:bodyPr>
-          <a:lstStyle/>
-          <a:p>
-            <a:pPr algn="ctr"/>
-            <a:r>
-              <a:rPr lang="pt-BR" dirty="0">
-                <a:latin typeface="AlternateGothic2 BT" panose="020B0608020202050204" pitchFamily="34" charset="0"/>
-              </a:rPr>
-              <a:t>CEA055 – Estatística e Probabilidade</a:t>
-            </a:r>
-            <a:br>
-              <a:rPr lang="pt-BR" dirty="0">
-                <a:latin typeface="AlternateGothic2 BT" panose="020B0608020202050204" pitchFamily="34" charset="0"/>
-              </a:rPr>
-            </a:br>
-            <a:r>
-              <a:rPr lang="pt-BR" sz="2200" b="1" dirty="0"/>
-              <a:t>Espaço Amostral e Eventos</a:t>
-            </a:r>
-            <a:endParaRPr lang="pt-BR" dirty="0">
-              <a:latin typeface="AlternateGothic2 BT" panose="020B0608020202050204" pitchFamily="34" charset="0"/>
-            </a:endParaRPr>
-          </a:p>
-        </p:txBody>
-      </p:sp>
-      <p:sp>
-        <p:nvSpPr>
           <p:cNvPr id="6" name="CaixaDeTexto 5">
             <a:extLst>
               <a:ext uri="{FF2B5EF4-FFF2-40B4-BE49-F238E27FC236}">
@@ -11094,7 +9847,7 @@
         <p:spPr>
           <a:xfrm>
             <a:off x="361395" y="6488668"/>
-            <a:ext cx="2395336" cy="300210"/>
+            <a:ext cx="7620000" cy="300210"/>
           </a:xfrm>
           <a:prstGeom prst="rect">
             <a:avLst/>
@@ -11109,47 +9862,11 @@
           <a:p>
             <a:r>
               <a:rPr lang="pt-BR" sz="1351" dirty="0"/>
-              <a:t>Professor: Marcos Goulart Lima</a:t>
+              <a:t>CEA055 - Estatística e Probabilidade - Professor: Marcos Goulart Lima</a:t>
             </a:r>
           </a:p>
         </p:txBody>
       </p:sp>
-      <p:pic>
-        <p:nvPicPr>
-          <p:cNvPr id="8" name="Espaço Reservado para Conteúdo 4">
-            <a:extLst>
-              <a:ext uri="{FF2B5EF4-FFF2-40B4-BE49-F238E27FC236}">
-                <a16:creationId xmlns:a16="http://schemas.microsoft.com/office/drawing/2014/main" id="{65AB402D-D1A8-4F31-BA42-34A6F0FC69F9}"/>
-              </a:ext>
-            </a:extLst>
-          </p:cNvPr>
-          <p:cNvPicPr>
-            <a:picLocks noChangeAspect="1"/>
-          </p:cNvPicPr>
-          <p:nvPr/>
-        </p:nvPicPr>
-        <p:blipFill>
-          <a:blip r:embed="rId2">
-            <a:extLst>
-              <a:ext uri="{28A0092B-C50C-407E-A947-70E740481C1C}">
-                <a14:useLocalDpi xmlns:a14="http://schemas.microsoft.com/office/drawing/2010/main" val="0"/>
-              </a:ext>
-            </a:extLst>
-          </a:blip>
-          <a:stretch>
-            <a:fillRect/>
-          </a:stretch>
-        </p:blipFill>
-        <p:spPr>
-          <a:xfrm>
-            <a:off x="62144" y="112237"/>
-            <a:ext cx="588096" cy="1228523"/>
-          </a:xfrm>
-          <a:prstGeom prst="rect">
-            <a:avLst/>
-          </a:prstGeom>
-        </p:spPr>
-      </p:pic>
       <p:pic>
         <p:nvPicPr>
           <p:cNvPr id="5" name="Imagem 4">
@@ -11165,7 +9882,7 @@
           <p:nvPr/>
         </p:nvPicPr>
         <p:blipFill>
-          <a:blip r:embed="rId3"/>
+          <a:blip r:embed="rId2"/>
           <a:stretch>
             <a:fillRect/>
           </a:stretch>
@@ -11212,56 +9929,6 @@
       </p:grpSpPr>
       <p:sp>
         <p:nvSpPr>
-          <p:cNvPr id="2" name="Título 1">
-            <a:extLst>
-              <a:ext uri="{FF2B5EF4-FFF2-40B4-BE49-F238E27FC236}">
-                <a16:creationId xmlns:a16="http://schemas.microsoft.com/office/drawing/2014/main" id="{BC798918-7CB4-450A-A042-F0B538CA25DE}"/>
-              </a:ext>
-            </a:extLst>
-          </p:cNvPr>
-          <p:cNvSpPr>
-            <a:spLocks noGrp="1"/>
-          </p:cNvSpPr>
-          <p:nvPr>
-            <p:ph type="title"/>
-          </p:nvPr>
-        </p:nvSpPr>
-        <p:spPr>
-          <a:xfrm>
-            <a:off x="1032611" y="0"/>
-            <a:ext cx="10827959" cy="1574800"/>
-          </a:xfrm>
-        </p:spPr>
-        <p:txBody>
-          <a:bodyPr>
-            <a:normAutofit/>
-          </a:bodyPr>
-          <a:lstStyle/>
-          <a:p>
-            <a:pPr algn="ctr"/>
-            <a:r>
-              <a:rPr lang="pt-BR" dirty="0">
-                <a:latin typeface="AlternateGothic2 BT" panose="020B0608020202050204" pitchFamily="34" charset="0"/>
-              </a:rPr>
-              <a:t>CEA055 – Estatística e Probabilidade</a:t>
-            </a:r>
-            <a:br>
-              <a:rPr lang="pt-BR" dirty="0">
-                <a:latin typeface="AlternateGothic2 BT" panose="020B0608020202050204" pitchFamily="34" charset="0"/>
-              </a:rPr>
-            </a:br>
-            <a:r>
-              <a:rPr lang="pt-BR" sz="2200" b="1" dirty="0"/>
-              <a:t>Espaço Amostral e Eventos</a:t>
-            </a:r>
-            <a:endParaRPr lang="pt-BR" dirty="0">
-              <a:latin typeface="AlternateGothic2 BT" panose="020B0608020202050204" pitchFamily="34" charset="0"/>
-            </a:endParaRPr>
-          </a:p>
-        </p:txBody>
-      </p:sp>
-      <p:sp>
-        <p:nvSpPr>
           <p:cNvPr id="6" name="CaixaDeTexto 5">
             <a:extLst>
               <a:ext uri="{FF2B5EF4-FFF2-40B4-BE49-F238E27FC236}">
@@ -11373,7 +10040,7 @@
         <p:spPr>
           <a:xfrm>
             <a:off x="361395" y="6488668"/>
-            <a:ext cx="2395336" cy="300210"/>
+            <a:ext cx="7620000" cy="300210"/>
           </a:xfrm>
           <a:prstGeom prst="rect">
             <a:avLst/>
@@ -11388,47 +10055,11 @@
           <a:p>
             <a:r>
               <a:rPr lang="pt-BR" sz="1351" dirty="0"/>
-              <a:t>Professor: Marcos Goulart Lima</a:t>
+              <a:t>CEA055 - Estatística e Probabilidade - Professor: Marcos Goulart Lima</a:t>
             </a:r>
           </a:p>
         </p:txBody>
       </p:sp>
-      <p:pic>
-        <p:nvPicPr>
-          <p:cNvPr id="8" name="Espaço Reservado para Conteúdo 4">
-            <a:extLst>
-              <a:ext uri="{FF2B5EF4-FFF2-40B4-BE49-F238E27FC236}">
-                <a16:creationId xmlns:a16="http://schemas.microsoft.com/office/drawing/2014/main" id="{65AB402D-D1A8-4F31-BA42-34A6F0FC69F9}"/>
-              </a:ext>
-            </a:extLst>
-          </p:cNvPr>
-          <p:cNvPicPr>
-            <a:picLocks noChangeAspect="1"/>
-          </p:cNvPicPr>
-          <p:nvPr/>
-        </p:nvPicPr>
-        <p:blipFill>
-          <a:blip r:embed="rId3">
-            <a:extLst>
-              <a:ext uri="{28A0092B-C50C-407E-A947-70E740481C1C}">
-                <a14:useLocalDpi xmlns:a14="http://schemas.microsoft.com/office/drawing/2010/main" val="0"/>
-              </a:ext>
-            </a:extLst>
-          </a:blip>
-          <a:stretch>
-            <a:fillRect/>
-          </a:stretch>
-        </p:blipFill>
-        <p:spPr>
-          <a:xfrm>
-            <a:off x="62144" y="112237"/>
-            <a:ext cx="588096" cy="1228523"/>
-          </a:xfrm>
-          <a:prstGeom prst="rect">
-            <a:avLst/>
-          </a:prstGeom>
-        </p:spPr>
-      </p:pic>
       <p:pic>
         <p:nvPicPr>
           <p:cNvPr id="9" name="Imagem 8">
@@ -11444,7 +10075,7 @@
           <p:nvPr/>
         </p:nvPicPr>
         <p:blipFill>
-          <a:blip r:embed="rId4"/>
+          <a:blip r:embed="rId3"/>
           <a:stretch>
             <a:fillRect/>
           </a:stretch>
@@ -11663,7 +10294,7 @@
         <p:spPr>
           <a:xfrm>
             <a:off x="365760" y="6464808"/>
-            <a:ext cx="4828032" cy="310896"/>
+            <a:ext cx="7620000" cy="310896"/>
           </a:xfrm>
           <a:prstGeom prst="rect">
             <a:avLst/>
@@ -11682,7 +10313,7 @@
                   <a:srgbClr val="8A5C5E"/>
                 </a:solidFill>
               </a:rPr>
-              <a:t>Professor: Marcos Goulart Lima</a:t>
+              <a:t>CEA055 - Estatística e Probabilidade - Professor: Marcos Goulart Lima</a:t>
             </a:r>
           </a:p>
         </p:txBody>
@@ -11712,56 +10343,6 @@
           <a:chExt cx="0" cy="0"/>
         </a:xfrm>
       </p:grpSpPr>
-      <p:sp>
-        <p:nvSpPr>
-          <p:cNvPr id="2" name="Título 1">
-            <a:extLst>
-              <a:ext uri="{FF2B5EF4-FFF2-40B4-BE49-F238E27FC236}">
-                <a16:creationId xmlns:a16="http://schemas.microsoft.com/office/drawing/2014/main" id="{BC798918-7CB4-450A-A042-F0B538CA25DE}"/>
-              </a:ext>
-            </a:extLst>
-          </p:cNvPr>
-          <p:cNvSpPr>
-            <a:spLocks noGrp="1"/>
-          </p:cNvSpPr>
-          <p:nvPr>
-            <p:ph type="title"/>
-          </p:nvPr>
-        </p:nvSpPr>
-        <p:spPr>
-          <a:xfrm>
-            <a:off x="1032611" y="0"/>
-            <a:ext cx="10827959" cy="1574800"/>
-          </a:xfrm>
-        </p:spPr>
-        <p:txBody>
-          <a:bodyPr>
-            <a:normAutofit/>
-          </a:bodyPr>
-          <a:lstStyle/>
-          <a:p>
-            <a:pPr algn="ctr"/>
-            <a:r>
-              <a:rPr lang="pt-BR" dirty="0">
-                <a:latin typeface="AlternateGothic2 BT" panose="020B0608020202050204" pitchFamily="34" charset="0"/>
-              </a:rPr>
-              <a:t>CEA055 – Estatística e Probabilidade</a:t>
-            </a:r>
-            <a:br>
-              <a:rPr lang="pt-BR" dirty="0">
-                <a:latin typeface="AlternateGothic2 BT" panose="020B0608020202050204" pitchFamily="34" charset="0"/>
-              </a:rPr>
-            </a:br>
-            <a:r>
-              <a:rPr lang="pt-BR" sz="2200" b="1" dirty="0"/>
-              <a:t>Espaço Amostral e Eventos</a:t>
-            </a:r>
-            <a:endParaRPr lang="pt-BR" dirty="0">
-              <a:latin typeface="AlternateGothic2 BT" panose="020B0608020202050204" pitchFamily="34" charset="0"/>
-            </a:endParaRPr>
-          </a:p>
-        </p:txBody>
-      </p:sp>
       <mc:AlternateContent xmlns:mc="http://schemas.openxmlformats.org/markup-compatibility/2006" xmlns:a14="http://schemas.microsoft.com/office/drawing/2010/main">
         <mc:Choice Requires="a14">
           <p:sp>
@@ -12350,7 +10931,7 @@
         <p:spPr>
           <a:xfrm>
             <a:off x="361395" y="6488668"/>
-            <a:ext cx="2395336" cy="300210"/>
+            <a:ext cx="7620000" cy="300210"/>
           </a:xfrm>
           <a:prstGeom prst="rect">
             <a:avLst/>
@@ -12365,47 +10946,11 @@
           <a:p>
             <a:r>
               <a:rPr lang="pt-BR" sz="1351" dirty="0"/>
-              <a:t>Professor: Marcos Goulart Lima</a:t>
+              <a:t>CEA055 - Estatística e Probabilidade - Professor: Marcos Goulart Lima</a:t>
             </a:r>
           </a:p>
         </p:txBody>
       </p:sp>
-      <p:pic>
-        <p:nvPicPr>
-          <p:cNvPr id="8" name="Espaço Reservado para Conteúdo 4">
-            <a:extLst>
-              <a:ext uri="{FF2B5EF4-FFF2-40B4-BE49-F238E27FC236}">
-                <a16:creationId xmlns:a16="http://schemas.microsoft.com/office/drawing/2014/main" id="{65AB402D-D1A8-4F31-BA42-34A6F0FC69F9}"/>
-              </a:ext>
-            </a:extLst>
-          </p:cNvPr>
-          <p:cNvPicPr>
-            <a:picLocks noChangeAspect="1"/>
-          </p:cNvPicPr>
-          <p:nvPr/>
-        </p:nvPicPr>
-        <p:blipFill>
-          <a:blip r:embed="rId3">
-            <a:extLst>
-              <a:ext uri="{28A0092B-C50C-407E-A947-70E740481C1C}">
-                <a14:useLocalDpi xmlns:a14="http://schemas.microsoft.com/office/drawing/2010/main" val="0"/>
-              </a:ext>
-            </a:extLst>
-          </a:blip>
-          <a:stretch>
-            <a:fillRect/>
-          </a:stretch>
-        </p:blipFill>
-        <p:spPr>
-          <a:xfrm>
-            <a:off x="62144" y="112237"/>
-            <a:ext cx="588096" cy="1228523"/>
-          </a:xfrm>
-          <a:prstGeom prst="rect">
-            <a:avLst/>
-          </a:prstGeom>
-        </p:spPr>
-      </p:pic>
     </p:spTree>
     <p:extLst>
       <p:ext uri="{BB962C8B-B14F-4D97-AF65-F5344CB8AC3E}">
@@ -12436,62 +10981,6 @@
           <a:chExt cx="0" cy="0"/>
         </a:xfrm>
       </p:grpSpPr>
-      <p:sp>
-        <p:nvSpPr>
-          <p:cNvPr id="2" name="Título 1">
-            <a:extLst>
-              <a:ext uri="{FF2B5EF4-FFF2-40B4-BE49-F238E27FC236}">
-                <a16:creationId xmlns:a16="http://schemas.microsoft.com/office/drawing/2014/main" id="{BC798918-7CB4-450A-A042-F0B538CA25DE}"/>
-              </a:ext>
-            </a:extLst>
-          </p:cNvPr>
-          <p:cNvSpPr>
-            <a:spLocks noGrp="1"/>
-          </p:cNvSpPr>
-          <p:nvPr>
-            <p:ph type="title"/>
-          </p:nvPr>
-        </p:nvSpPr>
-        <p:spPr>
-          <a:xfrm>
-            <a:off x="1032611" y="0"/>
-            <a:ext cx="10827959" cy="1574800"/>
-          </a:xfrm>
-        </p:spPr>
-        <p:txBody>
-          <a:bodyPr>
-            <a:normAutofit/>
-          </a:bodyPr>
-          <a:lstStyle/>
-          <a:p>
-            <a:pPr algn="ctr"/>
-            <a:r>
-              <a:rPr lang="pt-BR" dirty="0">
-                <a:latin typeface="AlternateGothic2 BT" panose="020B0608020202050204" pitchFamily="34" charset="0"/>
-              </a:rPr>
-              <a:t>CEA055 – Estatística e Probabilidade</a:t>
-            </a:r>
-            <a:br>
-              <a:rPr lang="pt-BR" dirty="0">
-                <a:latin typeface="AlternateGothic2 BT" panose="020B0608020202050204" pitchFamily="34" charset="0"/>
-              </a:rPr>
-            </a:br>
-            <a:r>
-              <a:rPr lang="pt-BR" sz="2200" dirty="0">
-                <a:latin typeface="AlternateGothic2 BT" panose="020B0608020202050204" pitchFamily="34" charset="0"/>
-              </a:rPr>
-              <a:t>E</a:t>
-            </a:r>
-            <a:r>
-              <a:rPr lang="pt-BR" sz="2200" b="1" dirty="0"/>
-              <a:t>spaço Amostral e Eventos</a:t>
-            </a:r>
-            <a:endParaRPr lang="pt-BR" dirty="0">
-              <a:latin typeface="AlternateGothic2 BT" panose="020B0608020202050204" pitchFamily="34" charset="0"/>
-            </a:endParaRPr>
-          </a:p>
-        </p:txBody>
-      </p:sp>
       <mc:AlternateContent xmlns:mc="http://schemas.openxmlformats.org/markup-compatibility/2006" xmlns:a14="http://schemas.microsoft.com/office/drawing/2010/main">
         <mc:Choice Requires="a14">
           <p:sp>
@@ -12771,7 +11260,7 @@
         <p:spPr>
           <a:xfrm>
             <a:off x="361395" y="6488668"/>
-            <a:ext cx="2395336" cy="300210"/>
+            <a:ext cx="7620000" cy="300210"/>
           </a:xfrm>
           <a:prstGeom prst="rect">
             <a:avLst/>
@@ -12786,47 +11275,11 @@
           <a:p>
             <a:r>
               <a:rPr lang="pt-BR" sz="1351" dirty="0"/>
-              <a:t>Professor: Marcos Goulart Lima</a:t>
+              <a:t>CEA055 - Estatística e Probabilidade - Professor: Marcos Goulart Lima</a:t>
             </a:r>
           </a:p>
         </p:txBody>
       </p:sp>
-      <p:pic>
-        <p:nvPicPr>
-          <p:cNvPr id="8" name="Espaço Reservado para Conteúdo 4">
-            <a:extLst>
-              <a:ext uri="{FF2B5EF4-FFF2-40B4-BE49-F238E27FC236}">
-                <a16:creationId xmlns:a16="http://schemas.microsoft.com/office/drawing/2014/main" id="{65AB402D-D1A8-4F31-BA42-34A6F0FC69F9}"/>
-              </a:ext>
-            </a:extLst>
-          </p:cNvPr>
-          <p:cNvPicPr>
-            <a:picLocks noChangeAspect="1"/>
-          </p:cNvPicPr>
-          <p:nvPr/>
-        </p:nvPicPr>
-        <p:blipFill>
-          <a:blip r:embed="rId3">
-            <a:extLst>
-              <a:ext uri="{28A0092B-C50C-407E-A947-70E740481C1C}">
-                <a14:useLocalDpi xmlns:a14="http://schemas.microsoft.com/office/drawing/2010/main" val="0"/>
-              </a:ext>
-            </a:extLst>
-          </a:blip>
-          <a:stretch>
-            <a:fillRect/>
-          </a:stretch>
-        </p:blipFill>
-        <p:spPr>
-          <a:xfrm>
-            <a:off x="62144" y="112237"/>
-            <a:ext cx="588096" cy="1228523"/>
-          </a:xfrm>
-          <a:prstGeom prst="rect">
-            <a:avLst/>
-          </a:prstGeom>
-        </p:spPr>
-      </p:pic>
     </p:spTree>
     <p:extLst>
       <p:ext uri="{BB962C8B-B14F-4D97-AF65-F5344CB8AC3E}">
@@ -12857,56 +11310,6 @@
           <a:chExt cx="0" cy="0"/>
         </a:xfrm>
       </p:grpSpPr>
-      <p:sp>
-        <p:nvSpPr>
-          <p:cNvPr id="2" name="Título 1">
-            <a:extLst>
-              <a:ext uri="{FF2B5EF4-FFF2-40B4-BE49-F238E27FC236}">
-                <a16:creationId xmlns:a16="http://schemas.microsoft.com/office/drawing/2014/main" id="{BC798918-7CB4-450A-A042-F0B538CA25DE}"/>
-              </a:ext>
-            </a:extLst>
-          </p:cNvPr>
-          <p:cNvSpPr>
-            <a:spLocks noGrp="1"/>
-          </p:cNvSpPr>
-          <p:nvPr>
-            <p:ph type="title"/>
-          </p:nvPr>
-        </p:nvSpPr>
-        <p:spPr>
-          <a:xfrm>
-            <a:off x="1032611" y="0"/>
-            <a:ext cx="10827959" cy="1574800"/>
-          </a:xfrm>
-        </p:spPr>
-        <p:txBody>
-          <a:bodyPr>
-            <a:normAutofit/>
-          </a:bodyPr>
-          <a:lstStyle/>
-          <a:p>
-            <a:pPr algn="ctr"/>
-            <a:r>
-              <a:rPr lang="pt-BR" dirty="0">
-                <a:latin typeface="AlternateGothic2 BT" panose="020B0608020202050204" pitchFamily="34" charset="0"/>
-              </a:rPr>
-              <a:t>CEA055 – Estatística e Probabilidade</a:t>
-            </a:r>
-            <a:br>
-              <a:rPr lang="pt-BR" dirty="0">
-                <a:latin typeface="AlternateGothic2 BT" panose="020B0608020202050204" pitchFamily="34" charset="0"/>
-              </a:rPr>
-            </a:br>
-            <a:r>
-              <a:rPr lang="pt-BR" sz="2200" b="1" dirty="0"/>
-              <a:t>Espaço Amostral e Eventos</a:t>
-            </a:r>
-            <a:endParaRPr lang="pt-BR" dirty="0">
-              <a:latin typeface="AlternateGothic2 BT" panose="020B0608020202050204" pitchFamily="34" charset="0"/>
-            </a:endParaRPr>
-          </a:p>
-        </p:txBody>
-      </p:sp>
       <mc:AlternateContent xmlns:mc="http://schemas.openxmlformats.org/markup-compatibility/2006" xmlns:a14="http://schemas.microsoft.com/office/drawing/2010/main">
         <mc:Choice Requires="a14">
           <p:sp>
@@ -13492,7 +11895,7 @@
         <p:spPr>
           <a:xfrm>
             <a:off x="361395" y="6488668"/>
-            <a:ext cx="2395336" cy="300210"/>
+            <a:ext cx="7620000" cy="300210"/>
           </a:xfrm>
           <a:prstGeom prst="rect">
             <a:avLst/>
@@ -13507,47 +11910,11 @@
           <a:p>
             <a:r>
               <a:rPr lang="pt-BR" sz="1351" dirty="0"/>
-              <a:t>Professor: Marcos Goulart Lima</a:t>
+              <a:t>CEA055 - Estatística e Probabilidade - Professor: Marcos Goulart Lima</a:t>
             </a:r>
           </a:p>
         </p:txBody>
       </p:sp>
-      <p:pic>
-        <p:nvPicPr>
-          <p:cNvPr id="8" name="Espaço Reservado para Conteúdo 4">
-            <a:extLst>
-              <a:ext uri="{FF2B5EF4-FFF2-40B4-BE49-F238E27FC236}">
-                <a16:creationId xmlns:a16="http://schemas.microsoft.com/office/drawing/2014/main" id="{65AB402D-D1A8-4F31-BA42-34A6F0FC69F9}"/>
-              </a:ext>
-            </a:extLst>
-          </p:cNvPr>
-          <p:cNvPicPr>
-            <a:picLocks noChangeAspect="1"/>
-          </p:cNvPicPr>
-          <p:nvPr/>
-        </p:nvPicPr>
-        <p:blipFill>
-          <a:blip r:embed="rId3">
-            <a:extLst>
-              <a:ext uri="{28A0092B-C50C-407E-A947-70E740481C1C}">
-                <a14:useLocalDpi xmlns:a14="http://schemas.microsoft.com/office/drawing/2010/main" val="0"/>
-              </a:ext>
-            </a:extLst>
-          </a:blip>
-          <a:stretch>
-            <a:fillRect/>
-          </a:stretch>
-        </p:blipFill>
-        <p:spPr>
-          <a:xfrm>
-            <a:off x="62144" y="112237"/>
-            <a:ext cx="588096" cy="1228523"/>
-          </a:xfrm>
-          <a:prstGeom prst="rect">
-            <a:avLst/>
-          </a:prstGeom>
-        </p:spPr>
-      </p:pic>
     </p:spTree>
     <p:extLst>
       <p:ext uri="{BB962C8B-B14F-4D97-AF65-F5344CB8AC3E}">
@@ -13578,56 +11945,6 @@
           <a:chExt cx="0" cy="0"/>
         </a:xfrm>
       </p:grpSpPr>
-      <p:sp>
-        <p:nvSpPr>
-          <p:cNvPr id="2" name="Título 1">
-            <a:extLst>
-              <a:ext uri="{FF2B5EF4-FFF2-40B4-BE49-F238E27FC236}">
-                <a16:creationId xmlns:a16="http://schemas.microsoft.com/office/drawing/2014/main" id="{BC798918-7CB4-450A-A042-F0B538CA25DE}"/>
-              </a:ext>
-            </a:extLst>
-          </p:cNvPr>
-          <p:cNvSpPr>
-            <a:spLocks noGrp="1"/>
-          </p:cNvSpPr>
-          <p:nvPr>
-            <p:ph type="title"/>
-          </p:nvPr>
-        </p:nvSpPr>
-        <p:spPr>
-          <a:xfrm>
-            <a:off x="1032611" y="0"/>
-            <a:ext cx="10827959" cy="1574800"/>
-          </a:xfrm>
-        </p:spPr>
-        <p:txBody>
-          <a:bodyPr>
-            <a:normAutofit/>
-          </a:bodyPr>
-          <a:lstStyle/>
-          <a:p>
-            <a:pPr algn="ctr"/>
-            <a:r>
-              <a:rPr lang="pt-BR" dirty="0">
-                <a:latin typeface="AlternateGothic2 BT" panose="020B0608020202050204" pitchFamily="34" charset="0"/>
-              </a:rPr>
-              <a:t>CEA055 – Estatística e Probabilidade</a:t>
-            </a:r>
-            <a:br>
-              <a:rPr lang="pt-BR" dirty="0">
-                <a:latin typeface="AlternateGothic2 BT" panose="020B0608020202050204" pitchFamily="34" charset="0"/>
-              </a:rPr>
-            </a:br>
-            <a:r>
-              <a:rPr lang="pt-BR" sz="2200" b="1" dirty="0"/>
-              <a:t>Espaço Amostral e Eventos</a:t>
-            </a:r>
-            <a:endParaRPr lang="pt-BR" dirty="0">
-              <a:latin typeface="AlternateGothic2 BT" panose="020B0608020202050204" pitchFamily="34" charset="0"/>
-            </a:endParaRPr>
-          </a:p>
-        </p:txBody>
-      </p:sp>
       <mc:AlternateContent xmlns:mc="http://schemas.openxmlformats.org/markup-compatibility/2006" xmlns:a14="http://schemas.microsoft.com/office/drawing/2010/main">
         <mc:Choice Requires="a14">
           <p:sp>
@@ -14060,7 +12377,7 @@
         <p:spPr>
           <a:xfrm>
             <a:off x="361395" y="6488668"/>
-            <a:ext cx="2395336" cy="300210"/>
+            <a:ext cx="7620000" cy="300210"/>
           </a:xfrm>
           <a:prstGeom prst="rect">
             <a:avLst/>
@@ -14075,47 +12392,11 @@
           <a:p>
             <a:r>
               <a:rPr lang="pt-BR" sz="1351" dirty="0"/>
-              <a:t>Professor: Marcos Goulart Lima</a:t>
+              <a:t>CEA055 - Estatística e Probabilidade - Professor: Marcos Goulart Lima</a:t>
             </a:r>
           </a:p>
         </p:txBody>
       </p:sp>
-      <p:pic>
-        <p:nvPicPr>
-          <p:cNvPr id="8" name="Espaço Reservado para Conteúdo 4">
-            <a:extLst>
-              <a:ext uri="{FF2B5EF4-FFF2-40B4-BE49-F238E27FC236}">
-                <a16:creationId xmlns:a16="http://schemas.microsoft.com/office/drawing/2014/main" id="{65AB402D-D1A8-4F31-BA42-34A6F0FC69F9}"/>
-              </a:ext>
-            </a:extLst>
-          </p:cNvPr>
-          <p:cNvPicPr>
-            <a:picLocks noChangeAspect="1"/>
-          </p:cNvPicPr>
-          <p:nvPr/>
-        </p:nvPicPr>
-        <p:blipFill>
-          <a:blip r:embed="rId3">
-            <a:extLst>
-              <a:ext uri="{28A0092B-C50C-407E-A947-70E740481C1C}">
-                <a14:useLocalDpi xmlns:a14="http://schemas.microsoft.com/office/drawing/2010/main" val="0"/>
-              </a:ext>
-            </a:extLst>
-          </a:blip>
-          <a:stretch>
-            <a:fillRect/>
-          </a:stretch>
-        </p:blipFill>
-        <p:spPr>
-          <a:xfrm>
-            <a:off x="62144" y="112237"/>
-            <a:ext cx="588096" cy="1228523"/>
-          </a:xfrm>
-          <a:prstGeom prst="rect">
-            <a:avLst/>
-          </a:prstGeom>
-        </p:spPr>
-      </p:pic>
     </p:spTree>
     <p:extLst>
       <p:ext uri="{BB962C8B-B14F-4D97-AF65-F5344CB8AC3E}">
@@ -14148,56 +12429,6 @@
       </p:grpSpPr>
       <p:sp>
         <p:nvSpPr>
-          <p:cNvPr id="2" name="Título 1">
-            <a:extLst>
-              <a:ext uri="{FF2B5EF4-FFF2-40B4-BE49-F238E27FC236}">
-                <a16:creationId xmlns:a16="http://schemas.microsoft.com/office/drawing/2014/main" id="{BC798918-7CB4-450A-A042-F0B538CA25DE}"/>
-              </a:ext>
-            </a:extLst>
-          </p:cNvPr>
-          <p:cNvSpPr>
-            <a:spLocks noGrp="1"/>
-          </p:cNvSpPr>
-          <p:nvPr>
-            <p:ph type="title"/>
-          </p:nvPr>
-        </p:nvSpPr>
-        <p:spPr>
-          <a:xfrm>
-            <a:off x="1032611" y="0"/>
-            <a:ext cx="10827959" cy="1574800"/>
-          </a:xfrm>
-        </p:spPr>
-        <p:txBody>
-          <a:bodyPr>
-            <a:normAutofit/>
-          </a:bodyPr>
-          <a:lstStyle/>
-          <a:p>
-            <a:pPr algn="ctr"/>
-            <a:r>
-              <a:rPr lang="pt-BR" dirty="0">
-                <a:latin typeface="AlternateGothic2 BT" panose="020B0608020202050204" pitchFamily="34" charset="0"/>
-              </a:rPr>
-              <a:t>CEA055 – Estatística e Probabilidade</a:t>
-            </a:r>
-            <a:br>
-              <a:rPr lang="pt-BR" dirty="0">
-                <a:latin typeface="AlternateGothic2 BT" panose="020B0608020202050204" pitchFamily="34" charset="0"/>
-              </a:rPr>
-            </a:br>
-            <a:r>
-              <a:rPr lang="pt-BR" sz="2200" b="1" dirty="0"/>
-              <a:t>Espaço Amostral e Eventos — Atividades</a:t>
-            </a:r>
-            <a:endParaRPr lang="pt-BR" dirty="0">
-              <a:latin typeface="AlternateGothic2 BT" panose="020B0608020202050204" pitchFamily="34" charset="0"/>
-            </a:endParaRPr>
-          </a:p>
-        </p:txBody>
-      </p:sp>
-      <p:sp>
-        <p:nvSpPr>
           <p:cNvPr id="6" name="CaixaDeTexto 5">
             <a:extLst>
               <a:ext uri="{FF2B5EF4-FFF2-40B4-BE49-F238E27FC236}">
@@ -14211,7 +12442,7 @@
         <p:spPr>
           <a:xfrm>
             <a:off x="881687" y="1441868"/>
-            <a:ext cx="10067277" cy="4610365"/>
+            <a:ext cx="10067277" cy="3086871"/>
           </a:xfrm>
           <a:prstGeom prst="rect">
             <a:avLst/>
@@ -14294,45 +12525,13 @@
             </a:pPr>
             <a:r>
               <a:rPr lang="pt-BR" sz="2200" dirty="0"/>
-              <a:t>Morettin — Cap. 1: 1.1 a 1.6; Cap. 2: 2.1</a:t>
-            </a:r>
-          </a:p>
-          <a:p>
-            <a:pPr>
-              <a:lnSpc>
-                <a:spcPct val="150000"/>
-              </a:lnSpc>
-            </a:pPr>
-            <a:r>
-              <a:rPr lang="pt-BR" sz="2200" dirty="0"/>
-              <a:t>Exercícios recomendados:</a:t>
-            </a:r>
-          </a:p>
-          <a:p>
-            <a:pPr marL="457178" indent="-457178">
-              <a:lnSpc>
-                <a:spcPct val="150000"/>
-              </a:lnSpc>
-              <a:buFont typeface="Arial" panose="020B0604020202020204" pitchFamily="34" charset="0"/>
-              <a:buChar char="•"/>
-            </a:pPr>
-            <a:r>
-              <a:rPr lang="pt-BR" sz="2200" dirty="0"/>
-              <a:t>Morettin, Cap. 1: exercícios 1 a 04</a:t>
-            </a:r>
-          </a:p>
-          <a:p>
-            <a:pPr marL="457178" indent="-457178">
-              <a:lnSpc>
-                <a:spcPct val="150000"/>
-              </a:lnSpc>
-              <a:buFont typeface="Arial" panose="020B0604020202020204" pitchFamily="34" charset="0"/>
-              <a:buChar char="•"/>
-            </a:pPr>
-            <a:r>
-              <a:rPr lang="pt-BR" sz="2200" dirty="0"/>
-              <a:t>Bussab, Cap. 5: exercícios sobre espaço amostral e axiomas de probabilidade</a:t>
-            </a:r>
+              <a:t>Morettin — Cap. 1: 1.1 a 1.6; Cap. 2</a:t>
+            </a:r>
+            <a:r>
+              <a:rPr lang="pt-BR" sz="2200"/>
+              <a:t>: 2.1</a:t>
+            </a:r>
+            <a:endParaRPr lang="pt-BR" sz="2200" dirty="0"/>
           </a:p>
         </p:txBody>
       </p:sp>
@@ -14351,7 +12550,7 @@
         <p:spPr>
           <a:xfrm>
             <a:off x="361395" y="6488668"/>
-            <a:ext cx="2395336" cy="300210"/>
+            <a:ext cx="7620000" cy="300210"/>
           </a:xfrm>
           <a:prstGeom prst="rect">
             <a:avLst/>
@@ -14366,51 +12565,191 @@
           <a:p>
             <a:r>
               <a:rPr lang="pt-BR" sz="1351" dirty="0"/>
-              <a:t>Professor: Marcos Goulart Lima</a:t>
+              <a:t>CEA055 - Estatística e Probabilidade - Professor: Marcos Goulart Lima</a:t>
             </a:r>
           </a:p>
         </p:txBody>
       </p:sp>
-      <p:pic>
-        <p:nvPicPr>
-          <p:cNvPr id="8" name="Espaço Reservado para Conteúdo 4">
+    </p:spTree>
+    <p:extLst>
+      <p:ext uri="{BB962C8B-B14F-4D97-AF65-F5344CB8AC3E}">
+        <p14:creationId xmlns:p14="http://schemas.microsoft.com/office/powerpoint/2010/main" val="1670738953"/>
+      </p:ext>
+    </p:extLst>
+  </p:cSld>
+  <p:clrMapOvr>
+    <a:masterClrMapping/>
+  </p:clrMapOvr>
+</p:sld>
+</file>
+
+<file path=ppt/slides/slide33.xml><?xml version="1.0" encoding="utf-8"?>
+<p:sld xmlns:a="http://schemas.openxmlformats.org/drawingml/2006/main" xmlns:r="http://schemas.openxmlformats.org/officeDocument/2006/relationships" xmlns:p="http://schemas.openxmlformats.org/presentationml/2006/main">
+  <p:cSld>
+    <p:spTree>
+      <p:nvGrpSpPr>
+        <p:cNvPr id="1" name=""/>
+        <p:cNvGrpSpPr/>
+        <p:nvPr/>
+      </p:nvGrpSpPr>
+      <p:grpSpPr>
+        <a:xfrm>
+          <a:off x="0" y="0"/>
+          <a:ext cx="0" cy="0"/>
+          <a:chOff x="0" y="0"/>
+          <a:chExt cx="0" cy="0"/>
+        </a:xfrm>
+      </p:grpSpPr>
+      <p:sp>
+        <p:nvSpPr>
+          <p:cNvPr id="6" name="CaixaDeTexto 5">
             <a:extLst>
               <a:ext uri="{FF2B5EF4-FFF2-40B4-BE49-F238E27FC236}">
-                <a16:creationId xmlns:a16="http://schemas.microsoft.com/office/drawing/2014/main" id="{65AB402D-D1A8-4F31-BA42-34A6F0FC69F9}"/>
+                <a16:creationId xmlns:a16="http://schemas.microsoft.com/office/drawing/2014/main" id="{720B10DA-C761-4DEE-8D86-E170E1C2E981}"/>
               </a:ext>
             </a:extLst>
           </p:cNvPr>
-          <p:cNvPicPr>
-            <a:picLocks noChangeAspect="1"/>
-          </p:cNvPicPr>
+          <p:cNvSpPr txBox="1"/>
           <p:nvPr/>
-        </p:nvPicPr>
-        <p:blipFill>
-          <a:blip r:embed="rId2">
-            <a:extLst>
-              <a:ext uri="{28A0092B-C50C-407E-A947-70E740481C1C}">
-                <a14:useLocalDpi xmlns:a14="http://schemas.microsoft.com/office/drawing/2010/main" val="0"/>
-              </a:ext>
-            </a:extLst>
-          </a:blip>
-          <a:stretch>
-            <a:fillRect/>
-          </a:stretch>
-        </p:blipFill>
+        </p:nvSpPr>
         <p:spPr>
           <a:xfrm>
-            <a:off x="62144" y="112237"/>
-            <a:ext cx="588096" cy="1228523"/>
+            <a:off x="881687" y="1441868"/>
+            <a:ext cx="10067277" cy="4102533"/>
           </a:xfrm>
           <a:prstGeom prst="rect">
             <a:avLst/>
           </a:prstGeom>
+          <a:noFill/>
         </p:spPr>
-      </p:pic>
+        <p:txBody>
+          <a:bodyPr wrap="square" rtlCol="0">
+            <a:spAutoFit/>
+          </a:bodyPr>
+          <a:lstStyle/>
+          <a:p>
+            <a:pPr>
+              <a:lnSpc>
+                <a:spcPct val="150000"/>
+              </a:lnSpc>
+            </a:pPr>
+            <a:r>
+              <a:rPr lang="pt-BR" sz="2200" b="1" dirty="0"/>
+              <a:t>Atividades referentes </a:t>
+            </a:r>
+            <a:r>
+              <a:rPr lang="pt-BR" sz="2200" b="1"/>
+              <a:t>à aula (continuação)</a:t>
+            </a:r>
+            <a:endParaRPr lang="pt-BR" sz="2200" b="1" dirty="0"/>
+          </a:p>
+          <a:p>
+            <a:pPr>
+              <a:lnSpc>
+                <a:spcPct val="150000"/>
+              </a:lnSpc>
+            </a:pPr>
+            <a:r>
+              <a:rPr lang="pt-BR" sz="2200"/>
+              <a:t>Exercícios recomendados:</a:t>
+            </a:r>
+            <a:endParaRPr lang="it-IT" sz="2200"/>
+          </a:p>
+          <a:p>
+            <a:pPr marL="457178" indent="-457178">
+              <a:lnSpc>
+                <a:spcPct val="150000"/>
+              </a:lnSpc>
+              <a:buFont typeface="Arial" panose="020B0604020202020204" pitchFamily="34" charset="0"/>
+              <a:buChar char="•"/>
+            </a:pPr>
+            <a:r>
+              <a:rPr lang="it-IT" sz="2200"/>
+              <a:t>Bussab &amp; Morettin — Cap. 5: Problemas 1, 2, 3, 5, 6, 7, 8, 11, 12 e 14</a:t>
+            </a:r>
+            <a:endParaRPr lang="pt-BR" sz="2200"/>
+          </a:p>
+          <a:p>
+            <a:pPr marL="457178" indent="-457178">
+              <a:lnSpc>
+                <a:spcPct val="150000"/>
+              </a:lnSpc>
+              <a:buFont typeface="Arial" panose="020B0604020202020204" pitchFamily="34" charset="0"/>
+              <a:buChar char="•"/>
+            </a:pPr>
+            <a:r>
+              <a:rPr lang="pt-BR" sz="2200"/>
+              <a:t>Magalhães &amp; Lima — Cap. 2 (Exercícios da Seção 2.1): 1, 2, 3, 4 e 5; Cap. 2 (2.3 Exercícios): 1 e 2</a:t>
+            </a:r>
+          </a:p>
+          <a:p>
+            <a:pPr marL="457178" indent="-457178">
+              <a:lnSpc>
+                <a:spcPct val="150000"/>
+              </a:lnSpc>
+              <a:buFont typeface="Arial" panose="020B0604020202020204" pitchFamily="34" charset="0"/>
+              <a:buChar char="•"/>
+            </a:pPr>
+            <a:r>
+              <a:rPr lang="pt-BR" sz="2200"/>
+              <a:t>Montgomery &amp; Runger — Cap. 2: Exercícios 2.1.1, 2.1.3, 2.1.6, 2.1.8, 2.1.9, 2.1.10, 2.1.12, 2.1.13, 2.3.1 e 2.3.2</a:t>
+            </a:r>
+          </a:p>
+          <a:p>
+            <a:pPr marL="457178" indent="-457178">
+              <a:lnSpc>
+                <a:spcPct val="150000"/>
+              </a:lnSpc>
+              <a:buFont typeface="Arial" panose="020B0604020202020204" pitchFamily="34" charset="0"/>
+              <a:buChar char="•"/>
+            </a:pPr>
+            <a:r>
+              <a:rPr lang="pt-BR" sz="2200"/>
+              <a:t>Morettin — Cap. 1: Exercícios 1, 2, 3 e 4; Cap. 2: Exercícios 2, 3 e 4</a:t>
+            </a:r>
+            <a:endParaRPr lang="pt-BR" sz="2200" dirty="0"/>
+          </a:p>
+        </p:txBody>
+      </p:sp>
+      <p:sp>
+        <p:nvSpPr>
+          <p:cNvPr id="3" name="CaixaDeTexto 2">
+            <a:extLst>
+              <a:ext uri="{FF2B5EF4-FFF2-40B4-BE49-F238E27FC236}">
+                <a16:creationId xmlns:a16="http://schemas.microsoft.com/office/drawing/2014/main" id="{19131A04-B5D6-4211-8B49-4615DE5797E9}"/>
+              </a:ext>
+            </a:extLst>
+          </p:cNvPr>
+          <p:cNvSpPr txBox="1"/>
+          <p:nvPr/>
+        </p:nvSpPr>
+        <p:spPr>
+          <a:xfrm>
+            <a:off x="361395" y="6488668"/>
+            <a:ext cx="7620000" cy="300210"/>
+          </a:xfrm>
+          <a:prstGeom prst="rect">
+            <a:avLst/>
+          </a:prstGeom>
+          <a:noFill/>
+        </p:spPr>
+        <p:txBody>
+          <a:bodyPr wrap="none" rtlCol="0">
+            <a:spAutoFit/>
+          </a:bodyPr>
+          <a:lstStyle/>
+          <a:p>
+            <a:r>
+              <a:rPr lang="pt-BR" sz="1351" dirty="0"/>
+              <a:t>CEA055 - Estatística e Probabilidade - Professor: Marcos Goulart Lima</a:t>
+            </a:r>
+          </a:p>
+        </p:txBody>
+      </p:sp>
     </p:spTree>
     <p:extLst>
       <p:ext uri="{BB962C8B-B14F-4D97-AF65-F5344CB8AC3E}">
-        <p14:creationId xmlns:p14="http://schemas.microsoft.com/office/powerpoint/2010/main" val="1670738953"/>
+        <p14:creationId xmlns:p14="http://schemas.microsoft.com/office/powerpoint/2010/main" val="3311433249"/>
       </p:ext>
     </p:extLst>
   </p:cSld>
@@ -14437,62 +12776,6 @@
           <a:chExt cx="0" cy="0"/>
         </a:xfrm>
       </p:grpSpPr>
-      <p:sp>
-        <p:nvSpPr>
-          <p:cNvPr id="2" name="Título 1">
-            <a:extLst>
-              <a:ext uri="{FF2B5EF4-FFF2-40B4-BE49-F238E27FC236}">
-                <a16:creationId xmlns:a16="http://schemas.microsoft.com/office/drawing/2014/main" id="{BC798918-7CB4-450A-A042-F0B538CA25DE}"/>
-              </a:ext>
-            </a:extLst>
-          </p:cNvPr>
-          <p:cNvSpPr>
-            <a:spLocks noGrp="1"/>
-          </p:cNvSpPr>
-          <p:nvPr>
-            <p:ph type="title"/>
-          </p:nvPr>
-        </p:nvSpPr>
-        <p:spPr>
-          <a:xfrm>
-            <a:off x="1032611" y="0"/>
-            <a:ext cx="10827959" cy="1574800"/>
-          </a:xfrm>
-        </p:spPr>
-        <p:txBody>
-          <a:bodyPr>
-            <a:normAutofit/>
-          </a:bodyPr>
-          <a:lstStyle/>
-          <a:p>
-            <a:pPr algn="ctr"/>
-            <a:r>
-              <a:rPr lang="pt-BR" dirty="0">
-                <a:latin typeface="AlternateGothic2 BT" panose="020B0608020202050204" pitchFamily="34" charset="0"/>
-              </a:rPr>
-              <a:t>CEA055 – Estatística e Probabilidade</a:t>
-            </a:r>
-            <a:br>
-              <a:rPr lang="pt-BR" dirty="0">
-                <a:latin typeface="AlternateGothic2 BT" panose="020B0608020202050204" pitchFamily="34" charset="0"/>
-              </a:rPr>
-            </a:br>
-            <a:r>
-              <a:rPr lang="pt-BR" sz="2200" dirty="0">
-                <a:latin typeface="AlternateGothic2 BT" panose="020B0608020202050204" pitchFamily="34" charset="0"/>
-              </a:rPr>
-              <a:t>E</a:t>
-            </a:r>
-            <a:r>
-              <a:rPr lang="pt-BR" sz="2200" b="1" dirty="0"/>
-              <a:t>spaço Amostral e Eventos</a:t>
-            </a:r>
-            <a:endParaRPr lang="pt-BR" dirty="0">
-              <a:latin typeface="AlternateGothic2 BT" panose="020B0608020202050204" pitchFamily="34" charset="0"/>
-            </a:endParaRPr>
-          </a:p>
-        </p:txBody>
-      </p:sp>
       <mc:AlternateContent xmlns:mc="http://schemas.openxmlformats.org/markup-compatibility/2006" xmlns:a14="http://schemas.microsoft.com/office/drawing/2010/main">
         <mc:Choice Requires="a14">
           <p:sp>
@@ -14871,7 +13154,7 @@
         <p:spPr>
           <a:xfrm>
             <a:off x="361395" y="6488668"/>
-            <a:ext cx="2395336" cy="300210"/>
+            <a:ext cx="7620000" cy="300210"/>
           </a:xfrm>
           <a:prstGeom prst="rect">
             <a:avLst/>
@@ -14886,47 +13169,11 @@
           <a:p>
             <a:r>
               <a:rPr lang="pt-BR" sz="1351" dirty="0"/>
-              <a:t>Professor: Marcos Goulart Lima</a:t>
+              <a:t>CEA055 - Estatística e Probabilidade - Professor: Marcos Goulart Lima</a:t>
             </a:r>
           </a:p>
         </p:txBody>
       </p:sp>
-      <p:pic>
-        <p:nvPicPr>
-          <p:cNvPr id="8" name="Espaço Reservado para Conteúdo 4">
-            <a:extLst>
-              <a:ext uri="{FF2B5EF4-FFF2-40B4-BE49-F238E27FC236}">
-                <a16:creationId xmlns:a16="http://schemas.microsoft.com/office/drawing/2014/main" id="{65AB402D-D1A8-4F31-BA42-34A6F0FC69F9}"/>
-              </a:ext>
-            </a:extLst>
-          </p:cNvPr>
-          <p:cNvPicPr>
-            <a:picLocks noChangeAspect="1"/>
-          </p:cNvPicPr>
-          <p:nvPr/>
-        </p:nvPicPr>
-        <p:blipFill>
-          <a:blip r:embed="rId3">
-            <a:extLst>
-              <a:ext uri="{28A0092B-C50C-407E-A947-70E740481C1C}">
-                <a14:useLocalDpi xmlns:a14="http://schemas.microsoft.com/office/drawing/2010/main" val="0"/>
-              </a:ext>
-            </a:extLst>
-          </a:blip>
-          <a:stretch>
-            <a:fillRect/>
-          </a:stretch>
-        </p:blipFill>
-        <p:spPr>
-          <a:xfrm>
-            <a:off x="62144" y="112237"/>
-            <a:ext cx="588096" cy="1228523"/>
-          </a:xfrm>
-          <a:prstGeom prst="rect">
-            <a:avLst/>
-          </a:prstGeom>
-        </p:spPr>
-      </p:pic>
     </p:spTree>
     <p:extLst>
       <p:ext uri="{BB962C8B-B14F-4D97-AF65-F5344CB8AC3E}">
@@ -14957,62 +13204,6 @@
           <a:chExt cx="0" cy="0"/>
         </a:xfrm>
       </p:grpSpPr>
-      <p:sp>
-        <p:nvSpPr>
-          <p:cNvPr id="2" name="Título 1">
-            <a:extLst>
-              <a:ext uri="{FF2B5EF4-FFF2-40B4-BE49-F238E27FC236}">
-                <a16:creationId xmlns:a16="http://schemas.microsoft.com/office/drawing/2014/main" id="{BC798918-7CB4-450A-A042-F0B538CA25DE}"/>
-              </a:ext>
-            </a:extLst>
-          </p:cNvPr>
-          <p:cNvSpPr>
-            <a:spLocks noGrp="1"/>
-          </p:cNvSpPr>
-          <p:nvPr>
-            <p:ph type="title"/>
-          </p:nvPr>
-        </p:nvSpPr>
-        <p:spPr>
-          <a:xfrm>
-            <a:off x="1032611" y="0"/>
-            <a:ext cx="10827959" cy="1574800"/>
-          </a:xfrm>
-        </p:spPr>
-        <p:txBody>
-          <a:bodyPr>
-            <a:normAutofit/>
-          </a:bodyPr>
-          <a:lstStyle/>
-          <a:p>
-            <a:pPr algn="ctr"/>
-            <a:r>
-              <a:rPr lang="pt-BR" dirty="0">
-                <a:latin typeface="AlternateGothic2 BT" panose="020B0608020202050204" pitchFamily="34" charset="0"/>
-              </a:rPr>
-              <a:t>CEA055 – Estatística e Probabilidade</a:t>
-            </a:r>
-            <a:br>
-              <a:rPr lang="pt-BR" dirty="0">
-                <a:latin typeface="AlternateGothic2 BT" panose="020B0608020202050204" pitchFamily="34" charset="0"/>
-              </a:rPr>
-            </a:br>
-            <a:r>
-              <a:rPr lang="pt-BR" sz="2200" dirty="0">
-                <a:latin typeface="AlternateGothic2 BT" panose="020B0608020202050204" pitchFamily="34" charset="0"/>
-              </a:rPr>
-              <a:t>E</a:t>
-            </a:r>
-            <a:r>
-              <a:rPr lang="pt-BR" sz="2200" b="1" dirty="0"/>
-              <a:t>spaço Amostral e Eventos</a:t>
-            </a:r>
-            <a:endParaRPr lang="pt-BR" dirty="0">
-              <a:latin typeface="AlternateGothic2 BT" panose="020B0608020202050204" pitchFamily="34" charset="0"/>
-            </a:endParaRPr>
-          </a:p>
-        </p:txBody>
-      </p:sp>
       <mc:AlternateContent xmlns:mc="http://schemas.openxmlformats.org/markup-compatibility/2006" xmlns:a14="http://schemas.microsoft.com/office/drawing/2010/main">
         <mc:Choice Requires="a14">
           <p:sp>
@@ -15210,7 +13401,7 @@
         <p:spPr>
           <a:xfrm>
             <a:off x="361395" y="6488668"/>
-            <a:ext cx="2395336" cy="300210"/>
+            <a:ext cx="7620000" cy="300210"/>
           </a:xfrm>
           <a:prstGeom prst="rect">
             <a:avLst/>
@@ -15225,47 +13416,11 @@
           <a:p>
             <a:r>
               <a:rPr lang="pt-BR" sz="1351" dirty="0"/>
-              <a:t>Professor: Marcos Goulart Lima</a:t>
+              <a:t>CEA055 - Estatística e Probabilidade - Professor: Marcos Goulart Lima</a:t>
             </a:r>
           </a:p>
         </p:txBody>
       </p:sp>
-      <p:pic>
-        <p:nvPicPr>
-          <p:cNvPr id="8" name="Espaço Reservado para Conteúdo 4">
-            <a:extLst>
-              <a:ext uri="{FF2B5EF4-FFF2-40B4-BE49-F238E27FC236}">
-                <a16:creationId xmlns:a16="http://schemas.microsoft.com/office/drawing/2014/main" id="{65AB402D-D1A8-4F31-BA42-34A6F0FC69F9}"/>
-              </a:ext>
-            </a:extLst>
-          </p:cNvPr>
-          <p:cNvPicPr>
-            <a:picLocks noChangeAspect="1"/>
-          </p:cNvPicPr>
-          <p:nvPr/>
-        </p:nvPicPr>
-        <p:blipFill>
-          <a:blip r:embed="rId3">
-            <a:extLst>
-              <a:ext uri="{28A0092B-C50C-407E-A947-70E740481C1C}">
-                <a14:useLocalDpi xmlns:a14="http://schemas.microsoft.com/office/drawing/2010/main" val="0"/>
-              </a:ext>
-            </a:extLst>
-          </a:blip>
-          <a:stretch>
-            <a:fillRect/>
-          </a:stretch>
-        </p:blipFill>
-        <p:spPr>
-          <a:xfrm>
-            <a:off x="62144" y="112237"/>
-            <a:ext cx="588096" cy="1228523"/>
-          </a:xfrm>
-          <a:prstGeom prst="rect">
-            <a:avLst/>
-          </a:prstGeom>
-        </p:spPr>
-      </p:pic>
     </p:spTree>
     <p:extLst>
       <p:ext uri="{BB962C8B-B14F-4D97-AF65-F5344CB8AC3E}">
@@ -15296,62 +13451,6 @@
           <a:chExt cx="0" cy="0"/>
         </a:xfrm>
       </p:grpSpPr>
-      <p:sp>
-        <p:nvSpPr>
-          <p:cNvPr id="2" name="Título 1">
-            <a:extLst>
-              <a:ext uri="{FF2B5EF4-FFF2-40B4-BE49-F238E27FC236}">
-                <a16:creationId xmlns:a16="http://schemas.microsoft.com/office/drawing/2014/main" id="{BC798918-7CB4-450A-A042-F0B538CA25DE}"/>
-              </a:ext>
-            </a:extLst>
-          </p:cNvPr>
-          <p:cNvSpPr>
-            <a:spLocks noGrp="1"/>
-          </p:cNvSpPr>
-          <p:nvPr>
-            <p:ph type="title"/>
-          </p:nvPr>
-        </p:nvSpPr>
-        <p:spPr>
-          <a:xfrm>
-            <a:off x="1032611" y="0"/>
-            <a:ext cx="10827959" cy="1574800"/>
-          </a:xfrm>
-        </p:spPr>
-        <p:txBody>
-          <a:bodyPr>
-            <a:normAutofit/>
-          </a:bodyPr>
-          <a:lstStyle/>
-          <a:p>
-            <a:pPr algn="ctr"/>
-            <a:r>
-              <a:rPr lang="pt-BR" dirty="0">
-                <a:latin typeface="AlternateGothic2 BT" panose="020B0608020202050204" pitchFamily="34" charset="0"/>
-              </a:rPr>
-              <a:t>CEA055 – Estatística e Probabilidade</a:t>
-            </a:r>
-            <a:br>
-              <a:rPr lang="pt-BR" dirty="0">
-                <a:latin typeface="AlternateGothic2 BT" panose="020B0608020202050204" pitchFamily="34" charset="0"/>
-              </a:rPr>
-            </a:br>
-            <a:r>
-              <a:rPr lang="pt-BR" sz="2200" dirty="0">
-                <a:latin typeface="AlternateGothic2 BT" panose="020B0608020202050204" pitchFamily="34" charset="0"/>
-              </a:rPr>
-              <a:t>E</a:t>
-            </a:r>
-            <a:r>
-              <a:rPr lang="pt-BR" sz="2200" b="1" dirty="0"/>
-              <a:t>spaço Amostral e Eventos</a:t>
-            </a:r>
-            <a:endParaRPr lang="pt-BR" dirty="0">
-              <a:latin typeface="AlternateGothic2 BT" panose="020B0608020202050204" pitchFamily="34" charset="0"/>
-            </a:endParaRPr>
-          </a:p>
-        </p:txBody>
-      </p:sp>
       <mc:AlternateContent xmlns:mc="http://schemas.openxmlformats.org/markup-compatibility/2006" xmlns:a14="http://schemas.microsoft.com/office/drawing/2010/main">
         <mc:Choice Requires="a14">
           <p:sp>
@@ -15746,7 +13845,7 @@
         <p:spPr>
           <a:xfrm>
             <a:off x="361395" y="6488668"/>
-            <a:ext cx="2395336" cy="300210"/>
+            <a:ext cx="7620000" cy="300210"/>
           </a:xfrm>
           <a:prstGeom prst="rect">
             <a:avLst/>
@@ -15761,47 +13860,11 @@
           <a:p>
             <a:r>
               <a:rPr lang="pt-BR" sz="1351" dirty="0"/>
-              <a:t>Professor: Marcos Goulart Lima</a:t>
+              <a:t>CEA055 - Estatística e Probabilidade - Professor: Marcos Goulart Lima</a:t>
             </a:r>
           </a:p>
         </p:txBody>
       </p:sp>
-      <p:pic>
-        <p:nvPicPr>
-          <p:cNvPr id="8" name="Espaço Reservado para Conteúdo 4">
-            <a:extLst>
-              <a:ext uri="{FF2B5EF4-FFF2-40B4-BE49-F238E27FC236}">
-                <a16:creationId xmlns:a16="http://schemas.microsoft.com/office/drawing/2014/main" id="{65AB402D-D1A8-4F31-BA42-34A6F0FC69F9}"/>
-              </a:ext>
-            </a:extLst>
-          </p:cNvPr>
-          <p:cNvPicPr>
-            <a:picLocks noChangeAspect="1"/>
-          </p:cNvPicPr>
-          <p:nvPr/>
-        </p:nvPicPr>
-        <p:blipFill>
-          <a:blip r:embed="rId3">
-            <a:extLst>
-              <a:ext uri="{28A0092B-C50C-407E-A947-70E740481C1C}">
-                <a14:useLocalDpi xmlns:a14="http://schemas.microsoft.com/office/drawing/2010/main" val="0"/>
-              </a:ext>
-            </a:extLst>
-          </a:blip>
-          <a:stretch>
-            <a:fillRect/>
-          </a:stretch>
-        </p:blipFill>
-        <p:spPr>
-          <a:xfrm>
-            <a:off x="62144" y="112237"/>
-            <a:ext cx="588096" cy="1228523"/>
-          </a:xfrm>
-          <a:prstGeom prst="rect">
-            <a:avLst/>
-          </a:prstGeom>
-        </p:spPr>
-      </p:pic>
     </p:spTree>
     <p:extLst>
       <p:ext uri="{BB962C8B-B14F-4D97-AF65-F5344CB8AC3E}">
@@ -15832,62 +13895,6 @@
           <a:chExt cx="0" cy="0"/>
         </a:xfrm>
       </p:grpSpPr>
-      <p:sp>
-        <p:nvSpPr>
-          <p:cNvPr id="2" name="Título 1">
-            <a:extLst>
-              <a:ext uri="{FF2B5EF4-FFF2-40B4-BE49-F238E27FC236}">
-                <a16:creationId xmlns:a16="http://schemas.microsoft.com/office/drawing/2014/main" id="{BC798918-7CB4-450A-A042-F0B538CA25DE}"/>
-              </a:ext>
-            </a:extLst>
-          </p:cNvPr>
-          <p:cNvSpPr>
-            <a:spLocks noGrp="1"/>
-          </p:cNvSpPr>
-          <p:nvPr>
-            <p:ph type="title"/>
-          </p:nvPr>
-        </p:nvSpPr>
-        <p:spPr>
-          <a:xfrm>
-            <a:off x="1032611" y="0"/>
-            <a:ext cx="10827959" cy="1574800"/>
-          </a:xfrm>
-        </p:spPr>
-        <p:txBody>
-          <a:bodyPr>
-            <a:normAutofit/>
-          </a:bodyPr>
-          <a:lstStyle/>
-          <a:p>
-            <a:pPr algn="ctr"/>
-            <a:r>
-              <a:rPr lang="pt-BR" dirty="0">
-                <a:latin typeface="AlternateGothic2 BT" panose="020B0608020202050204" pitchFamily="34" charset="0"/>
-              </a:rPr>
-              <a:t>CEA055 – Estatística e Probabilidade</a:t>
-            </a:r>
-            <a:br>
-              <a:rPr lang="pt-BR" dirty="0">
-                <a:latin typeface="AlternateGothic2 BT" panose="020B0608020202050204" pitchFamily="34" charset="0"/>
-              </a:rPr>
-            </a:br>
-            <a:r>
-              <a:rPr lang="pt-BR" sz="2200" dirty="0">
-                <a:latin typeface="AlternateGothic2 BT" panose="020B0608020202050204" pitchFamily="34" charset="0"/>
-              </a:rPr>
-              <a:t>E</a:t>
-            </a:r>
-            <a:r>
-              <a:rPr lang="pt-BR" sz="2200" b="1" dirty="0"/>
-              <a:t>spaço Amostral e Eventos</a:t>
-            </a:r>
-            <a:endParaRPr lang="pt-BR" dirty="0">
-              <a:latin typeface="AlternateGothic2 BT" panose="020B0608020202050204" pitchFamily="34" charset="0"/>
-            </a:endParaRPr>
-          </a:p>
-        </p:txBody>
-      </p:sp>
       <mc:AlternateContent xmlns:mc="http://schemas.openxmlformats.org/markup-compatibility/2006" xmlns:a14="http://schemas.microsoft.com/office/drawing/2010/main">
         <mc:Choice Requires="a14">
           <p:sp>
@@ -16198,7 +14205,7 @@
         <p:spPr>
           <a:xfrm>
             <a:off x="361395" y="6488668"/>
-            <a:ext cx="2395336" cy="300210"/>
+            <a:ext cx="7620000" cy="300210"/>
           </a:xfrm>
           <a:prstGeom prst="rect">
             <a:avLst/>
@@ -16213,47 +14220,11 @@
           <a:p>
             <a:r>
               <a:rPr lang="pt-BR" sz="1351" dirty="0"/>
-              <a:t>Professor: Marcos Goulart Lima</a:t>
+              <a:t>CEA055 - Estatística e Probabilidade - Professor: Marcos Goulart Lima</a:t>
             </a:r>
           </a:p>
         </p:txBody>
       </p:sp>
-      <p:pic>
-        <p:nvPicPr>
-          <p:cNvPr id="8" name="Espaço Reservado para Conteúdo 4">
-            <a:extLst>
-              <a:ext uri="{FF2B5EF4-FFF2-40B4-BE49-F238E27FC236}">
-                <a16:creationId xmlns:a16="http://schemas.microsoft.com/office/drawing/2014/main" id="{65AB402D-D1A8-4F31-BA42-34A6F0FC69F9}"/>
-              </a:ext>
-            </a:extLst>
-          </p:cNvPr>
-          <p:cNvPicPr>
-            <a:picLocks noChangeAspect="1"/>
-          </p:cNvPicPr>
-          <p:nvPr/>
-        </p:nvPicPr>
-        <p:blipFill>
-          <a:blip r:embed="rId3">
-            <a:extLst>
-              <a:ext uri="{28A0092B-C50C-407E-A947-70E740481C1C}">
-                <a14:useLocalDpi xmlns:a14="http://schemas.microsoft.com/office/drawing/2010/main" val="0"/>
-              </a:ext>
-            </a:extLst>
-          </a:blip>
-          <a:stretch>
-            <a:fillRect/>
-          </a:stretch>
-        </p:blipFill>
-        <p:spPr>
-          <a:xfrm>
-            <a:off x="62144" y="112237"/>
-            <a:ext cx="588096" cy="1228523"/>
-          </a:xfrm>
-          <a:prstGeom prst="rect">
-            <a:avLst/>
-          </a:prstGeom>
-        </p:spPr>
-      </p:pic>
     </p:spTree>
     <p:extLst>
       <p:ext uri="{BB962C8B-B14F-4D97-AF65-F5344CB8AC3E}">
@@ -16284,62 +14255,6 @@
           <a:chExt cx="0" cy="0"/>
         </a:xfrm>
       </p:grpSpPr>
-      <p:sp>
-        <p:nvSpPr>
-          <p:cNvPr id="2" name="Título 1">
-            <a:extLst>
-              <a:ext uri="{FF2B5EF4-FFF2-40B4-BE49-F238E27FC236}">
-                <a16:creationId xmlns:a16="http://schemas.microsoft.com/office/drawing/2014/main" id="{BC798918-7CB4-450A-A042-F0B538CA25DE}"/>
-              </a:ext>
-            </a:extLst>
-          </p:cNvPr>
-          <p:cNvSpPr>
-            <a:spLocks noGrp="1"/>
-          </p:cNvSpPr>
-          <p:nvPr>
-            <p:ph type="title"/>
-          </p:nvPr>
-        </p:nvSpPr>
-        <p:spPr>
-          <a:xfrm>
-            <a:off x="1032611" y="0"/>
-            <a:ext cx="10827959" cy="1574800"/>
-          </a:xfrm>
-        </p:spPr>
-        <p:txBody>
-          <a:bodyPr>
-            <a:normAutofit/>
-          </a:bodyPr>
-          <a:lstStyle/>
-          <a:p>
-            <a:pPr algn="ctr"/>
-            <a:r>
-              <a:rPr lang="pt-BR" dirty="0">
-                <a:latin typeface="AlternateGothic2 BT" panose="020B0608020202050204" pitchFamily="34" charset="0"/>
-              </a:rPr>
-              <a:t>CEA055 – Estatística e Probabilidade</a:t>
-            </a:r>
-            <a:br>
-              <a:rPr lang="pt-BR" dirty="0">
-                <a:latin typeface="AlternateGothic2 BT" panose="020B0608020202050204" pitchFamily="34" charset="0"/>
-              </a:rPr>
-            </a:br>
-            <a:r>
-              <a:rPr lang="pt-BR" sz="2200" dirty="0">
-                <a:latin typeface="AlternateGothic2 BT" panose="020B0608020202050204" pitchFamily="34" charset="0"/>
-              </a:rPr>
-              <a:t>E</a:t>
-            </a:r>
-            <a:r>
-              <a:rPr lang="pt-BR" sz="2200" b="1" dirty="0"/>
-              <a:t>spaço Amostral e Eventos</a:t>
-            </a:r>
-            <a:endParaRPr lang="pt-BR" dirty="0">
-              <a:latin typeface="AlternateGothic2 BT" panose="020B0608020202050204" pitchFamily="34" charset="0"/>
-            </a:endParaRPr>
-          </a:p>
-        </p:txBody>
-      </p:sp>
       <mc:AlternateContent xmlns:mc="http://schemas.openxmlformats.org/markup-compatibility/2006" xmlns:a14="http://schemas.microsoft.com/office/drawing/2010/main">
         <mc:Choice Requires="a14">
           <p:sp>
@@ -16720,7 +14635,7 @@
         <p:spPr>
           <a:xfrm>
             <a:off x="361395" y="6488668"/>
-            <a:ext cx="2395336" cy="300210"/>
+            <a:ext cx="7620000" cy="300210"/>
           </a:xfrm>
           <a:prstGeom prst="rect">
             <a:avLst/>
@@ -16735,47 +14650,11 @@
           <a:p>
             <a:r>
               <a:rPr lang="pt-BR" sz="1351" dirty="0"/>
-              <a:t>Professor: Marcos Goulart Lima</a:t>
+              <a:t>CEA055 - Estatística e Probabilidade - Professor: Marcos Goulart Lima</a:t>
             </a:r>
           </a:p>
         </p:txBody>
       </p:sp>
-      <p:pic>
-        <p:nvPicPr>
-          <p:cNvPr id="8" name="Espaço Reservado para Conteúdo 4">
-            <a:extLst>
-              <a:ext uri="{FF2B5EF4-FFF2-40B4-BE49-F238E27FC236}">
-                <a16:creationId xmlns:a16="http://schemas.microsoft.com/office/drawing/2014/main" id="{65AB402D-D1A8-4F31-BA42-34A6F0FC69F9}"/>
-              </a:ext>
-            </a:extLst>
-          </p:cNvPr>
-          <p:cNvPicPr>
-            <a:picLocks noChangeAspect="1"/>
-          </p:cNvPicPr>
-          <p:nvPr/>
-        </p:nvPicPr>
-        <p:blipFill>
-          <a:blip r:embed="rId3">
-            <a:extLst>
-              <a:ext uri="{28A0092B-C50C-407E-A947-70E740481C1C}">
-                <a14:useLocalDpi xmlns:a14="http://schemas.microsoft.com/office/drawing/2010/main" val="0"/>
-              </a:ext>
-            </a:extLst>
-          </a:blip>
-          <a:stretch>
-            <a:fillRect/>
-          </a:stretch>
-        </p:blipFill>
-        <p:spPr>
-          <a:xfrm>
-            <a:off x="62144" y="112237"/>
-            <a:ext cx="588096" cy="1228523"/>
-          </a:xfrm>
-          <a:prstGeom prst="rect">
-            <a:avLst/>
-          </a:prstGeom>
-        </p:spPr>
-      </p:pic>
     </p:spTree>
     <p:extLst>
       <p:ext uri="{BB962C8B-B14F-4D97-AF65-F5344CB8AC3E}">
@@ -16806,62 +14685,6 @@
           <a:chExt cx="0" cy="0"/>
         </a:xfrm>
       </p:grpSpPr>
-      <p:sp>
-        <p:nvSpPr>
-          <p:cNvPr id="2" name="Título 1">
-            <a:extLst>
-              <a:ext uri="{FF2B5EF4-FFF2-40B4-BE49-F238E27FC236}">
-                <a16:creationId xmlns:a16="http://schemas.microsoft.com/office/drawing/2014/main" id="{BC798918-7CB4-450A-A042-F0B538CA25DE}"/>
-              </a:ext>
-            </a:extLst>
-          </p:cNvPr>
-          <p:cNvSpPr>
-            <a:spLocks noGrp="1"/>
-          </p:cNvSpPr>
-          <p:nvPr>
-            <p:ph type="title"/>
-          </p:nvPr>
-        </p:nvSpPr>
-        <p:spPr>
-          <a:xfrm>
-            <a:off x="1032611" y="0"/>
-            <a:ext cx="10827959" cy="1574800"/>
-          </a:xfrm>
-        </p:spPr>
-        <p:txBody>
-          <a:bodyPr>
-            <a:normAutofit/>
-          </a:bodyPr>
-          <a:lstStyle/>
-          <a:p>
-            <a:pPr algn="ctr"/>
-            <a:r>
-              <a:rPr lang="pt-BR" dirty="0">
-                <a:latin typeface="AlternateGothic2 BT" panose="020B0608020202050204" pitchFamily="34" charset="0"/>
-              </a:rPr>
-              <a:t>CEA055 – Estatística e Probabilidade</a:t>
-            </a:r>
-            <a:br>
-              <a:rPr lang="pt-BR" dirty="0">
-                <a:latin typeface="AlternateGothic2 BT" panose="020B0608020202050204" pitchFamily="34" charset="0"/>
-              </a:rPr>
-            </a:br>
-            <a:r>
-              <a:rPr lang="pt-BR" sz="2200" dirty="0">
-                <a:latin typeface="AlternateGothic2 BT" panose="020B0608020202050204" pitchFamily="34" charset="0"/>
-              </a:rPr>
-              <a:t>E</a:t>
-            </a:r>
-            <a:r>
-              <a:rPr lang="pt-BR" sz="2200" b="1" dirty="0"/>
-              <a:t>spaço Amostral e Eventos</a:t>
-            </a:r>
-            <a:endParaRPr lang="pt-BR" dirty="0">
-              <a:latin typeface="AlternateGothic2 BT" panose="020B0608020202050204" pitchFamily="34" charset="0"/>
-            </a:endParaRPr>
-          </a:p>
-        </p:txBody>
-      </p:sp>
       <mc:AlternateContent xmlns:mc="http://schemas.openxmlformats.org/markup-compatibility/2006" xmlns:a14="http://schemas.microsoft.com/office/drawing/2010/main">
         <mc:Choice Requires="a14">
           <p:sp>
@@ -17180,7 +15003,7 @@
         <p:spPr>
           <a:xfrm>
             <a:off x="361395" y="6488668"/>
-            <a:ext cx="2395336" cy="300210"/>
+            <a:ext cx="7620000" cy="300210"/>
           </a:xfrm>
           <a:prstGeom prst="rect">
             <a:avLst/>
@@ -17195,47 +15018,11 @@
           <a:p>
             <a:r>
               <a:rPr lang="pt-BR" sz="1351" dirty="0"/>
-              <a:t>Professor: Marcos Goulart Lima</a:t>
+              <a:t>CEA055 - Estatística e Probabilidade - Professor: Marcos Goulart Lima</a:t>
             </a:r>
           </a:p>
         </p:txBody>
       </p:sp>
-      <p:pic>
-        <p:nvPicPr>
-          <p:cNvPr id="8" name="Espaço Reservado para Conteúdo 4">
-            <a:extLst>
-              <a:ext uri="{FF2B5EF4-FFF2-40B4-BE49-F238E27FC236}">
-                <a16:creationId xmlns:a16="http://schemas.microsoft.com/office/drawing/2014/main" id="{65AB402D-D1A8-4F31-BA42-34A6F0FC69F9}"/>
-              </a:ext>
-            </a:extLst>
-          </p:cNvPr>
-          <p:cNvPicPr>
-            <a:picLocks noChangeAspect="1"/>
-          </p:cNvPicPr>
-          <p:nvPr/>
-        </p:nvPicPr>
-        <p:blipFill>
-          <a:blip r:embed="rId3">
-            <a:extLst>
-              <a:ext uri="{28A0092B-C50C-407E-A947-70E740481C1C}">
-                <a14:useLocalDpi xmlns:a14="http://schemas.microsoft.com/office/drawing/2010/main" val="0"/>
-              </a:ext>
-            </a:extLst>
-          </a:blip>
-          <a:stretch>
-            <a:fillRect/>
-          </a:stretch>
-        </p:blipFill>
-        <p:spPr>
-          <a:xfrm>
-            <a:off x="62144" y="112237"/>
-            <a:ext cx="588096" cy="1228523"/>
-          </a:xfrm>
-          <a:prstGeom prst="rect">
-            <a:avLst/>
-          </a:prstGeom>
-        </p:spPr>
-      </p:pic>
     </p:spTree>
     <p:extLst>
       <p:ext uri="{BB962C8B-B14F-4D97-AF65-F5344CB8AC3E}">

--- a/docs/2026-2/cea055-estatistica-probabilidade/03-introducao-probabilidade/arquivos/Aula_03_Introducao_Probabilidade.pptx
+++ b/docs/2026-2/cea055-estatistica-probabilidade/03-introducao-probabilidade/arquivos/Aula_03_Introducao_Probabilidade.pptx
@@ -4125,9 +4125,10 @@
               </a:lnSpc>
             </a:pPr>
             <a:r>
-              <a:rPr lang="pt-BR" sz="2400" b="1" dirty="0"/>
-              <a:t>Objetivos do aula:</a:t>
-            </a:r>
+              <a:rPr lang="pt-BR" sz="2400" b="1"/>
+              <a:t>Objetivos da aula:</a:t>
+            </a:r>
+            <a:endParaRPr lang="pt-BR" sz="2400" b="1" dirty="0"/>
           </a:p>
           <a:p>
             <a:pPr marL="285737" indent="-285737">
@@ -4210,15 +4211,23 @@
             </a:pPr>
             <a:r>
               <a:rPr lang="pt-BR" sz="2000" dirty="0"/>
-              <a:t>Montgomery, Runger. </a:t>
-            </a:r>
-            <a:r>
-              <a:rPr lang="pt-BR" sz="2000" b="1" dirty="0"/>
-              <a:t>Applied Statistics and Probability for Engineers</a:t>
+              <a:t>Montgomery, Runger</a:t>
+            </a:r>
+            <a:r>
+              <a:rPr lang="pt-BR" sz="2000"/>
+              <a:t>. </a:t>
+            </a:r>
+            <a:r>
+              <a:rPr lang="pt-BR" sz="2000" b="1"/>
+              <a:t>Estatística Aplicada e Probabilidade para Engenheiros</a:t>
+            </a:r>
+            <a:r>
+              <a:rPr lang="pt-BR" sz="2000"/>
+              <a:t>, 7ª ed. — </a:t>
             </a:r>
             <a:r>
               <a:rPr lang="pt-BR" sz="2000" dirty="0"/>
-              <a:t>, 7th ed — Cap. 2 (2.1, 2.3)</a:t>
+              <a:t>Cap. 2 (2.1, 2.3)</a:t>
             </a:r>
           </a:p>
           <a:p>
@@ -5106,7 +5115,13 @@
                           <a:rPr lang="pt-BR" sz="2800" b="0" i="1" dirty="0" smtClean="0">
                             <a:latin typeface="Cambria Math" panose="02040503050406030204" pitchFamily="18" charset="0"/>
                           </a:rPr>
-                          <m:t>=1</m:t>
+                          <m:t>=</m:t>
+                        </m:r>
+                        <m:r>
+                          <a:rPr lang="pt-BR" sz="2800" b="0" i="1" dirty="0" smtClean="0">
+                            <a:latin typeface="Cambria Math" panose="02040503050406030204" pitchFamily="18" charset="0"/>
+                          </a:rPr>
+                          <m:t>1</m:t>
                         </m:r>
                       </m:sub>
                       <m:sup>
@@ -5287,7 +5302,13 @@
                           <a:rPr lang="pt-BR" sz="2800" i="1" dirty="0">
                             <a:latin typeface="Cambria Math" panose="02040503050406030204" pitchFamily="18" charset="0"/>
                           </a:rPr>
-                          <m:t>=1</m:t>
+                          <m:t>=</m:t>
+                        </m:r>
+                        <m:r>
+                          <a:rPr lang="pt-BR" sz="2800" i="1" dirty="0">
+                            <a:latin typeface="Cambria Math" panose="02040503050406030204" pitchFamily="18" charset="0"/>
+                          </a:rPr>
+                          <m:t>1</m:t>
                         </m:r>
                       </m:sub>
                       <m:sup>
@@ -8729,7 +8750,19 @@
                       <a:rPr lang="pt-BR" sz="2800" b="0" i="1" smtClean="0">
                         <a:latin typeface="Cambria Math" panose="02040503050406030204" pitchFamily="18" charset="0"/>
                       </a:rPr>
-                      <m:t>=1,…,</m:t>
+                      <m:t>=</m:t>
+                    </m:r>
+                    <m:r>
+                      <a:rPr lang="pt-BR" sz="2800" b="0" i="1" smtClean="0">
+                        <a:latin typeface="Cambria Math" panose="02040503050406030204" pitchFamily="18" charset="0"/>
+                      </a:rPr>
+                      <m:t>1</m:t>
+                    </m:r>
+                    <m:r>
+                      <a:rPr lang="pt-BR" sz="2800" b="0" i="1" smtClean="0">
+                        <a:latin typeface="Cambria Math" panose="02040503050406030204" pitchFamily="18" charset="0"/>
+                      </a:rPr>
+                      <m:t>,…,</m:t>
                     </m:r>
                     <m:r>
                       <a:rPr lang="pt-BR" sz="2800" b="0" i="1" smtClean="0">
@@ -8904,7 +8937,13 @@
                           <a:rPr lang="pt-BR" sz="2800" b="0" i="1" smtClean="0">
                             <a:latin typeface="Cambria Math" panose="02040503050406030204" pitchFamily="18" charset="0"/>
                           </a:rPr>
-                          <m:t>=1</m:t>
+                          <m:t>=</m:t>
+                        </m:r>
+                        <m:r>
+                          <a:rPr lang="pt-BR" sz="2800" b="0" i="1" smtClean="0">
+                            <a:latin typeface="Cambria Math" panose="02040503050406030204" pitchFamily="18" charset="0"/>
+                          </a:rPr>
+                          <m:t>1</m:t>
                         </m:r>
                       </m:sub>
                       <m:sup>
@@ -12054,7 +12093,19 @@
                       <a:rPr lang="pt-BR" sz="2800" b="0" i="1" smtClean="0">
                         <a:latin typeface="Cambria Math" panose="02040503050406030204" pitchFamily="18" charset="0"/>
                       </a:rPr>
-                      <m:t>, 1≤</m:t>
+                      <m:t>, </m:t>
+                    </m:r>
+                    <m:r>
+                      <a:rPr lang="pt-BR" sz="2800" b="0" i="1" smtClean="0">
+                        <a:latin typeface="Cambria Math" panose="02040503050406030204" pitchFamily="18" charset="0"/>
+                      </a:rPr>
+                      <m:t>1</m:t>
+                    </m:r>
+                    <m:r>
+                      <a:rPr lang="pt-BR" sz="2800" b="0" i="1" smtClean="0">
+                        <a:latin typeface="Cambria Math" panose="02040503050406030204" pitchFamily="18" charset="0"/>
+                      </a:rPr>
+                      <m:t>≤</m:t>
                     </m:r>
                     <m:r>
                       <a:rPr lang="pt-BR" sz="2800" b="0" i="1" smtClean="0">
@@ -12146,7 +12197,19 @@
                       <a:rPr lang="pt-BR" sz="2800" b="0" i="1" smtClean="0">
                         <a:latin typeface="Cambria Math" panose="02040503050406030204" pitchFamily="18" charset="0"/>
                       </a:rPr>
-                      <m:t>, 1≤</m:t>
+                      <m:t>, </m:t>
+                    </m:r>
+                    <m:r>
+                      <a:rPr lang="pt-BR" sz="2800" b="0" i="1" smtClean="0">
+                        <a:latin typeface="Cambria Math" panose="02040503050406030204" pitchFamily="18" charset="0"/>
+                      </a:rPr>
+                      <m:t>1</m:t>
+                    </m:r>
+                    <m:r>
+                      <a:rPr lang="pt-BR" sz="2800" b="0" i="1" smtClean="0">
+                        <a:latin typeface="Cambria Math" panose="02040503050406030204" pitchFamily="18" charset="0"/>
+                      </a:rPr>
+                      <m:t>≤</m:t>
                     </m:r>
                     <m:r>
                       <a:rPr lang="pt-BR" sz="2800" b="0" i="1" smtClean="0">
@@ -12204,7 +12267,13 @@
                       <a:rPr lang="pt-BR" sz="2800" b="0" i="1" smtClean="0">
                         <a:latin typeface="Cambria Math" panose="02040503050406030204" pitchFamily="18" charset="0"/>
                       </a:rPr>
-                      <m:t>1/</m:t>
+                      <m:t>1</m:t>
+                    </m:r>
+                    <m:r>
+                      <a:rPr lang="pt-BR" sz="2800" b="0" i="1" smtClean="0">
+                        <a:latin typeface="Cambria Math" panose="02040503050406030204" pitchFamily="18" charset="0"/>
+                      </a:rPr>
+                      <m:t>/</m:t>
                     </m:r>
                     <m:r>
                       <a:rPr lang="pt-BR" sz="2800" b="0" i="1" smtClean="0">
@@ -12838,7 +12907,77 @@
                         <a:latin typeface="Cambria Math" panose="02040503050406030204" pitchFamily="18" charset="0"/>
                         <a:ea typeface="Cambria Math" panose="02040503050406030204" pitchFamily="18" charset="0"/>
                       </a:rPr>
-                      <m:t>={…,−2,−1, 0, 1, 2,…}</m:t>
+                      <m:t>={…,−</m:t>
+                    </m:r>
+                    <m:r>
+                      <a:rPr lang="pt-BR" sz="2800" b="0" i="1" smtClean="0">
+                        <a:latin typeface="Cambria Math" panose="02040503050406030204" pitchFamily="18" charset="0"/>
+                        <a:ea typeface="Cambria Math" panose="02040503050406030204" pitchFamily="18" charset="0"/>
+                      </a:rPr>
+                      <m:t>2</m:t>
+                    </m:r>
+                    <m:r>
+                      <a:rPr lang="pt-BR" sz="2800" b="0" i="1" smtClean="0">
+                        <a:latin typeface="Cambria Math" panose="02040503050406030204" pitchFamily="18" charset="0"/>
+                        <a:ea typeface="Cambria Math" panose="02040503050406030204" pitchFamily="18" charset="0"/>
+                      </a:rPr>
+                      <m:t>,−</m:t>
+                    </m:r>
+                    <m:r>
+                      <a:rPr lang="pt-BR" sz="2800" b="0" i="1" smtClean="0">
+                        <a:latin typeface="Cambria Math" panose="02040503050406030204" pitchFamily="18" charset="0"/>
+                        <a:ea typeface="Cambria Math" panose="02040503050406030204" pitchFamily="18" charset="0"/>
+                      </a:rPr>
+                      <m:t>1</m:t>
+                    </m:r>
+                    <m:r>
+                      <a:rPr lang="pt-BR" sz="2800" b="0" i="1" smtClean="0">
+                        <a:latin typeface="Cambria Math" panose="02040503050406030204" pitchFamily="18" charset="0"/>
+                        <a:ea typeface="Cambria Math" panose="02040503050406030204" pitchFamily="18" charset="0"/>
+                      </a:rPr>
+                      <m:t>, </m:t>
+                    </m:r>
+                    <m:r>
+                      <a:rPr lang="pt-BR" sz="2800" b="0" i="1" smtClean="0">
+                        <a:latin typeface="Cambria Math" panose="02040503050406030204" pitchFamily="18" charset="0"/>
+                        <a:ea typeface="Cambria Math" panose="02040503050406030204" pitchFamily="18" charset="0"/>
+                      </a:rPr>
+                      <m:t>0</m:t>
+                    </m:r>
+                    <m:r>
+                      <a:rPr lang="pt-BR" sz="2800" b="0" i="1" smtClean="0">
+                        <a:latin typeface="Cambria Math" panose="02040503050406030204" pitchFamily="18" charset="0"/>
+                        <a:ea typeface="Cambria Math" panose="02040503050406030204" pitchFamily="18" charset="0"/>
+                      </a:rPr>
+                      <m:t>, </m:t>
+                    </m:r>
+                    <m:r>
+                      <a:rPr lang="pt-BR" sz="2800" b="0" i="1" smtClean="0">
+                        <a:latin typeface="Cambria Math" panose="02040503050406030204" pitchFamily="18" charset="0"/>
+                        <a:ea typeface="Cambria Math" panose="02040503050406030204" pitchFamily="18" charset="0"/>
+                      </a:rPr>
+                      <m:t>1</m:t>
+                    </m:r>
+                    <m:r>
+                      <a:rPr lang="pt-BR" sz="2800" b="0" i="1" smtClean="0">
+                        <a:latin typeface="Cambria Math" panose="02040503050406030204" pitchFamily="18" charset="0"/>
+                        <a:ea typeface="Cambria Math" panose="02040503050406030204" pitchFamily="18" charset="0"/>
+                      </a:rPr>
+                      <m:t>, </m:t>
+                    </m:r>
+                    <m:r>
+                      <a:rPr lang="pt-BR" sz="2800" b="0" i="1" smtClean="0">
+                        <a:latin typeface="Cambria Math" panose="02040503050406030204" pitchFamily="18" charset="0"/>
+                        <a:ea typeface="Cambria Math" panose="02040503050406030204" pitchFamily="18" charset="0"/>
+                      </a:rPr>
+                      <m:t>2</m:t>
+                    </m:r>
+                    <m:r>
+                      <a:rPr lang="pt-BR" sz="2800" b="0" i="1" smtClean="0">
+                        <a:latin typeface="Cambria Math" panose="02040503050406030204" pitchFamily="18" charset="0"/>
+                        <a:ea typeface="Cambria Math" panose="02040503050406030204" pitchFamily="18" charset="0"/>
+                      </a:rPr>
+                      <m:t>,…}</m:t>
                     </m:r>
                   </m:oMath>
                 </a14:m>
@@ -12867,7 +13006,55 @@
                       <a:rPr lang="pt-BR" sz="2800" b="0" i="1" dirty="0" smtClean="0">
                         <a:latin typeface="Cambria Math" panose="02040503050406030204" pitchFamily="18" charset="0"/>
                       </a:rPr>
-                      <m:t>={ 0, 1, 2, 3…}</m:t>
+                      <m:t>={ </m:t>
+                    </m:r>
+                    <m:r>
+                      <a:rPr lang="pt-BR" sz="2800" b="0" i="1" dirty="0" smtClean="0">
+                        <a:latin typeface="Cambria Math" panose="02040503050406030204" pitchFamily="18" charset="0"/>
+                      </a:rPr>
+                      <m:t>0</m:t>
+                    </m:r>
+                    <m:r>
+                      <a:rPr lang="pt-BR" sz="2800" b="0" i="1" dirty="0" smtClean="0">
+                        <a:latin typeface="Cambria Math" panose="02040503050406030204" pitchFamily="18" charset="0"/>
+                      </a:rPr>
+                      <m:t>, </m:t>
+                    </m:r>
+                    <m:r>
+                      <a:rPr lang="pt-BR" sz="2800" b="0" i="1" dirty="0" smtClean="0">
+                        <a:latin typeface="Cambria Math" panose="02040503050406030204" pitchFamily="18" charset="0"/>
+                      </a:rPr>
+                      <m:t>1</m:t>
+                    </m:r>
+                    <m:r>
+                      <a:rPr lang="pt-BR" sz="2800" b="0" i="1" dirty="0" smtClean="0">
+                        <a:latin typeface="Cambria Math" panose="02040503050406030204" pitchFamily="18" charset="0"/>
+                      </a:rPr>
+                      <m:t>, </m:t>
+                    </m:r>
+                    <m:r>
+                      <a:rPr lang="pt-BR" sz="2800" b="0" i="1" dirty="0" smtClean="0">
+                        <a:latin typeface="Cambria Math" panose="02040503050406030204" pitchFamily="18" charset="0"/>
+                      </a:rPr>
+                      <m:t>2</m:t>
+                    </m:r>
+                    <m:r>
+                      <a:rPr lang="pt-BR" sz="2800" b="0" i="1" dirty="0" smtClean="0">
+                        <a:latin typeface="Cambria Math" panose="02040503050406030204" pitchFamily="18" charset="0"/>
+                      </a:rPr>
+                      <m:t>, </m:t>
+                    </m:r>
+                    <m:r>
+                      <a:rPr lang="pt-BR" sz="2800" b="0" i="1" dirty="0" smtClean="0">
+                        <a:latin typeface="Cambria Math" panose="02040503050406030204" pitchFamily="18" charset="0"/>
+                      </a:rPr>
+                      <m:t>3</m:t>
+                    </m:r>
+                    <m:r>
+                      <a:rPr lang="pt-BR" sz="2800" b="0" i="1" dirty="0" smtClean="0">
+                        <a:latin typeface="Cambria Math" panose="02040503050406030204" pitchFamily="18" charset="0"/>
+                      </a:rPr>
+                      <m:t>…}</m:t>
                     </m:r>
                   </m:oMath>
                 </a14:m>
@@ -13747,7 +13934,19 @@
                       <a:rPr lang="pt-BR" sz="2800" b="0" i="1" smtClean="0">
                         <a:latin typeface="Cambria Math" panose="02040503050406030204" pitchFamily="18" charset="0"/>
                       </a:rPr>
-                      <m:t>,+∞[</m:t>
+                      <m:t>,+</m:t>
+                    </m:r>
+                    <m:r>
+                      <a:rPr lang="pt-BR" sz="2800" b="0" i="1" smtClean="0">
+                        <a:latin typeface="Cambria Math" panose="02040503050406030204" pitchFamily="18" charset="0"/>
+                      </a:rPr>
+                      <m:t>∞</m:t>
+                    </m:r>
+                    <m:r>
+                      <a:rPr lang="pt-BR" sz="2800" b="0" i="1" smtClean="0">
+                        <a:latin typeface="Cambria Math" panose="02040503050406030204" pitchFamily="18" charset="0"/>
+                      </a:rPr>
+                      <m:t>[</m:t>
                     </m:r>
                   </m:oMath>
                 </a14:m>
@@ -13764,7 +13963,19 @@
                       <a:rPr lang="pt-BR" sz="2800" b="0" i="1" smtClean="0">
                         <a:latin typeface="Cambria Math" panose="02040503050406030204" pitchFamily="18" charset="0"/>
                       </a:rPr>
-                      <m:t>]−∞,</m:t>
+                      <m:t>]−</m:t>
+                    </m:r>
+                    <m:r>
+                      <a:rPr lang="pt-BR" sz="2800" b="0" i="1" smtClean="0">
+                        <a:latin typeface="Cambria Math" panose="02040503050406030204" pitchFamily="18" charset="0"/>
+                      </a:rPr>
+                      <m:t>∞</m:t>
+                    </m:r>
+                    <m:r>
+                      <a:rPr lang="pt-BR" sz="2800" b="0" i="1" smtClean="0">
+                        <a:latin typeface="Cambria Math" panose="02040503050406030204" pitchFamily="18" charset="0"/>
+                      </a:rPr>
+                      <m:t>,</m:t>
                     </m:r>
                     <m:r>
                       <a:rPr lang="pt-BR" sz="2800" b="0" i="1" smtClean="0">
